--- a/presentations/PF_L06_ChanceMachine_Lesson.pptx
+++ b/presentations/PF_L06_ChanceMachine_Lesson.pptx
@@ -19,9 +19,10 @@
     <p:sldId id="267" r:id="rId13"/>
     <p:sldId id="268" r:id="rId14"/>
     <p:sldId id="269" r:id="rId15"/>
+    <p:sldId id="270" r:id="rId16"/>
   </p:sldIdLst>
   <p:notesMasterIdLst>
-    <p:notesMasterId r:id="rId16"/>
+    <p:notesMasterId r:id="rId17"/>
   </p:notesMasterIdLst>
   <p:sldSz cx="12192000" cy="6858000"/>
   <p:notesSz cx="6858000" cy="12192000"/>
@@ -692,7 +693,13 @@
           <a:p>
             <a:r>
               <a:rPr lang="en-US" dirty="0"/>
-              <a:t>Make them commit to an answer on paper before they tap the star. Guessing first costs them the learning.</a:t>
+              <a:t>The answer is B: They are worked out by an algorithm, so they are not truly unpredictable.
+Do not say it yet. Every pupil commits first - fingers, whiteboards or a show of hands on each letter in turn - and you count the split before anyone can change their mind.
+IF MOST OF THE CLASS IS RIGHT: say why it is right in one sentence and go straight on to the independent work.
+IF A SIGNIFICANT GROUP IS ON ONE WRONG LETTER: that option is the misconception to teach against before anyone goes on. Go back to station 4, Pseudo-random, and work through its example again, aloud, with the class watching, then re-ask this question.
+The course's own response to a wrong answer here: An algorithm follows fixed steps, so it can only imitate randomness, however convincing the imitation looks.
+A limitation, stated rather than papered over: one response covers every wrong option; it does not say what to revisit for each one. The course does not record what each separate wrong option means, and this slide does not invent it. Decide your own reteach for each option before the lesson; the options above are the start of it.
+This is a real activity from the experience (pf-l06-s4-c1), so the wording here is the wording a pupil will see.</a:t>
             </a:r>
             <a:endParaRPr lang="en-US" dirty="0"/>
           </a:p>
@@ -780,7 +787,7 @@
           <a:p>
             <a:r>
               <a:rPr lang="en-US" dirty="0"/>
-              <a:t>Use these as a settler, or as something for early finishers to read in the experience.</a:t>
+              <a:t>Make them commit to an answer on paper before they tap the star. Guessing first costs them the learning.</a:t>
             </a:r>
             <a:endParaRPr lang="en-US" dirty="0"/>
           </a:p>
@@ -868,7 +875,7 @@
           <a:p>
             <a:r>
               <a:rPr lang="en-US" dirty="0"/>
-              <a:t>Timed and silent. Mark against the answer sheet, then ask students to record their weakest area.</a:t>
+              <a:t>Use these as a settler, or as something for early finishers to read in the experience.</a:t>
             </a:r>
             <a:endParaRPr lang="en-US" dirty="0"/>
           </a:p>
@@ -956,7 +963,7 @@
           <a:p>
             <a:r>
               <a:rPr lang="en-US" dirty="0"/>
-              <a:t>Students copy their score-screen breakdown onto the worksheet, then rate themselves here.</a:t>
+              <a:t>Timed and silent. Mark against the answer sheet, then ask students to record their weakest area.</a:t>
             </a:r>
             <a:endParaRPr lang="en-US" dirty="0"/>
           </a:p>
@@ -980,6 +987,94 @@
             <a:fld id="{F7021451-1387-4CA6-816F-3879F97B5CBC}" type="slidenum">
               <a:rPr lang="en-US"/>
               <a:t>14</a:t>
+            </a:fld>
+            <a:endParaRPr lang="en-US"/>
+          </a:p>
+        </p:txBody>
+      </p:sp>
+    </p:spTree>
+    <p:extLst>
+      <p:ext uri="{BB962C8B-B14F-4D97-AF65-F5344CB8AC3E}">
+        <p14:creationId xmlns:p14="http://schemas.microsoft.com/office/powerpoint/2010/main" val="1024086991"/>
+      </p:ext>
+    </p:extLst>
+  </p:cSld>
+  <p:clrMapOvr>
+    <a:masterClrMapping/>
+  </p:clrMapOvr>
+</p:notes>
+</file>
+
+<file path=ppt/notesSlides/notesSlide15.xml><?xml version="1.0" encoding="utf-8"?>
+<p:notes xmlns:a="http://schemas.openxmlformats.org/drawingml/2006/main" xmlns:r="http://schemas.openxmlformats.org/officeDocument/2006/relationships" xmlns:p="http://schemas.openxmlformats.org/presentationml/2006/main">
+  <p:cSld>
+    <p:spTree>
+      <p:nvGrpSpPr>
+        <p:cNvPr id="1" name=""/>
+        <p:cNvGrpSpPr/>
+        <p:nvPr/>
+      </p:nvGrpSpPr>
+      <p:grpSpPr>
+        <a:xfrm>
+          <a:off x="0" y="0"/>
+          <a:ext cx="0" cy="0"/>
+          <a:chOff x="0" y="0"/>
+          <a:chExt cx="0" cy="0"/>
+        </a:xfrm>
+      </p:grpSpPr>
+      <p:sp>
+        <p:nvSpPr>
+          <p:cNvPr id="2" name="Slide Image Placeholder 1"/>
+          <p:cNvSpPr>
+            <a:spLocks noGrp="1" noRot="1" noChangeAspect="1"/>
+          </p:cNvSpPr>
+          <p:nvPr>
+            <p:ph type="sldImg"/>
+          </p:nvPr>
+        </p:nvSpPr>
+        <p:spPr/>
+      </p:sp>
+      <p:sp>
+        <p:nvSpPr>
+          <p:cNvPr id="3" name="Notes Placeholder 2"/>
+          <p:cNvSpPr>
+            <a:spLocks noGrp="1"/>
+          </p:cNvSpPr>
+          <p:nvPr>
+            <p:ph type="body" idx="1"/>
+          </p:nvPr>
+        </p:nvSpPr>
+        <p:spPr/>
+        <p:txBody>
+          <a:bodyPr/>
+          <a:lstStyle/>
+          <a:p>
+            <a:r>
+              <a:rPr lang="en-US" dirty="0"/>
+              <a:t>Students copy their score-screen breakdown onto the worksheet, then rate themselves here.</a:t>
+            </a:r>
+            <a:endParaRPr lang="en-US" dirty="0"/>
+          </a:p>
+        </p:txBody>
+      </p:sp>
+      <p:sp>
+        <p:nvSpPr>
+          <p:cNvPr id="4" name="Slide Number Placeholder 3"/>
+          <p:cNvSpPr>
+            <a:spLocks noGrp="1"/>
+          </p:cNvSpPr>
+          <p:nvPr>
+            <p:ph type="sldNum" sz="quarter" idx="10"/>
+          </p:nvPr>
+        </p:nvSpPr>
+        <p:spPr/>
+        <p:txBody>
+          <a:bodyPr/>
+          <a:lstStyle/>
+          <a:p>
+            <a:fld id="{F7021451-1387-4CA6-816F-3879F97B5CBC}" type="slidenum">
+              <a:rPr lang="en-US"/>
+              <a:t>15</a:t>
             </a:fld>
             <a:endParaRPr lang="en-US"/>
           </a:p>
@@ -2949,12 +3044,12 @@
         </p:nvSpPr>
         <p:spPr>
           <a:xfrm>
-            <a:off x="502920" y="438912"/>
-            <a:ext cx="3108960" cy="502920"/>
+            <a:off x="502920" y="457200"/>
+            <a:ext cx="1051560" cy="420624"/>
           </a:xfrm>
           <a:prstGeom prst="roundRect">
             <a:avLst>
-              <a:gd name="adj" fmla="val 18182"/>
+              <a:gd name="adj" fmla="val 21739"/>
             </a:avLst>
           </a:prstGeom>
           <a:solidFill>
@@ -2971,8 +3066,8 @@
         </p:nvSpPr>
         <p:spPr>
           <a:xfrm>
-            <a:off x="502920" y="438912"/>
-            <a:ext cx="3108960" cy="502920"/>
+            <a:off x="502920" y="457200"/>
+            <a:ext cx="1051560" cy="420624"/>
           </a:xfrm>
           <a:prstGeom prst="rect">
             <a:avLst/>
@@ -2988,7 +3083,7 @@
               <a:buNone/>
             </a:pPr>
             <a:r>
-              <a:rPr lang="en-US" sz="1300" b="1" dirty="0">
+              <a:rPr lang="en-US" sz="1200" b="1" dirty="0">
                 <a:solidFill>
                   <a:srgbClr val="101828"/>
                 </a:solidFill>
@@ -2996,9 +3091,9 @@
                 <a:ea typeface="IBM Plex Mono" pitchFamily="34" charset="-122"/>
                 <a:cs typeface="IBM Plex Mono" pitchFamily="34" charset="-120"/>
               </a:rPr>
-              <a:t>★  FINAL CHALLENGE</a:t>
-            </a:r>
-            <a:endParaRPr lang="en-US" sz="1300" dirty="0"/>
+              <a:t>CHECK</a:t>
+            </a:r>
+            <a:endParaRPr lang="en-US" sz="1200" dirty="0"/>
           </a:p>
         </p:txBody>
       </p:sp>
@@ -3010,8 +3105,8 @@
         </p:nvSpPr>
         <p:spPr>
           <a:xfrm>
-            <a:off x="502920" y="1097280"/>
-            <a:ext cx="11155680" cy="731520"/>
+            <a:off x="1737360" y="457200"/>
+            <a:ext cx="9875520" cy="420624"/>
           </a:xfrm>
           <a:prstGeom prst="rect">
             <a:avLst/>
@@ -3027,34 +3122,76 @@
               <a:buNone/>
             </a:pPr>
             <a:r>
-              <a:rPr lang="en-US" sz="3400" b="1" dirty="0">
-                <a:solidFill>
-                  <a:srgbClr val="101828"/>
+              <a:rPr lang="en-US" sz="1500" dirty="0">
+                <a:solidFill>
+                  <a:srgbClr val="667085"/>
                 </a:solidFill>
                 <a:latin typeface="IBM Plex Sans" pitchFamily="34" charset="0"/>
                 <a:ea typeface="IBM Plex Sans" pitchFamily="34" charset="-122"/>
                 <a:cs typeface="IBM Plex Sans" pitchFamily="34" charset="-120"/>
               </a:rPr>
-              <a:t>How many rolls</a:t>
-            </a:r>
-            <a:endParaRPr lang="en-US" sz="3400" dirty="0"/>
-          </a:p>
-        </p:txBody>
-      </p:sp>
-      <p:sp>
-        <p:nvSpPr>
-          <p:cNvPr id="8" name="Shape 6"/>
+              <a:t>Hands down. Everyone commits.</a:t>
+            </a:r>
+            <a:endParaRPr lang="en-US" sz="1500" dirty="0"/>
+          </a:p>
+        </p:txBody>
+      </p:sp>
+      <p:sp>
+        <p:nvSpPr>
+          <p:cNvPr id="8" name="Text 6"/>
+          <p:cNvSpPr txBox="1"/>
+          <p:nvPr/>
+        </p:nvSpPr>
+        <p:spPr>
+          <a:xfrm>
+            <a:off x="502920" y="1097280"/>
+            <a:ext cx="11155680" cy="914400"/>
+          </a:xfrm>
+          <a:prstGeom prst="rect">
+            <a:avLst/>
+          </a:prstGeom>
+          <a:noFill/>
+          <a:ln/>
+        </p:spPr>
+        <p:txBody>
+          <a:bodyPr wrap="square" lIns="0" tIns="0" rIns="0" bIns="0" rtlCol="0" anchor="ctr"/>
+          <a:lstStyle/>
+          <a:p>
+            <a:pPr indent="0" marL="0">
+              <a:lnSpc>
+                <a:spcPct val="115000"/>
+              </a:lnSpc>
+              <a:buNone/>
+            </a:pPr>
+            <a:r>
+              <a:rPr lang="en-US" sz="2600" b="1" dirty="0">
+                <a:solidFill>
+                  <a:srgbClr val="101828"/>
+                </a:solidFill>
+                <a:latin typeface="IBM Plex Sans" pitchFamily="34" charset="0"/>
+                <a:ea typeface="IBM Plex Sans" pitchFamily="34" charset="-122"/>
+                <a:cs typeface="IBM Plex Sans" pitchFamily="34" charset="-120"/>
+              </a:rPr>
+              <a:t>Why are the numbers a computer produces described as pseudo-random?</a:t>
+            </a:r>
+            <a:endParaRPr lang="en-US" sz="2600" dirty="0"/>
+          </a:p>
+        </p:txBody>
+      </p:sp>
+      <p:sp>
+        <p:nvSpPr>
+          <p:cNvPr id="9" name="Shape 7"/>
           <p:cNvSpPr/>
           <p:nvPr/>
         </p:nvSpPr>
         <p:spPr>
           <a:xfrm>
-            <a:off x="502920" y="2011680"/>
-            <a:ext cx="11155680" cy="2194560"/>
+            <a:off x="502920" y="2148840"/>
+            <a:ext cx="11155680" cy="731520"/>
           </a:xfrm>
           <a:prstGeom prst="roundRect">
             <a:avLst>
-              <a:gd name="adj" fmla="val 5000"/>
+              <a:gd name="adj" fmla="val 15000"/>
             </a:avLst>
           </a:prstGeom>
           <a:solidFill>
@@ -3062,7 +3199,7 @@
           </a:solidFill>
           <a:ln w="15875">
             <a:solidFill>
-              <a:srgbClr val="2D63FF"/>
+              <a:srgbClr val="D9DEE7"/>
             </a:solidFill>
             <a:prstDash val="solid"/>
           </a:ln>
@@ -3070,14 +3207,75 @@
       </p:sp>
       <p:sp>
         <p:nvSpPr>
-          <p:cNvPr id="9" name="Text 7"/>
-          <p:cNvSpPr txBox="1"/>
-          <p:nvPr/>
-        </p:nvSpPr>
-        <p:spPr>
-          <a:xfrm>
-            <a:off x="1005840" y="2331720"/>
-            <a:ext cx="10149840" cy="1554480"/>
+          <p:cNvPr id="10" name="Shape 8"/>
+          <p:cNvSpPr/>
+          <p:nvPr/>
+        </p:nvSpPr>
+        <p:spPr>
+          <a:xfrm>
+            <a:off x="777240" y="2295144"/>
+            <a:ext cx="438912" cy="438912"/>
+          </a:xfrm>
+          <a:prstGeom prst="roundRect">
+            <a:avLst>
+              <a:gd name="adj" fmla="val 20833"/>
+            </a:avLst>
+          </a:prstGeom>
+          <a:solidFill>
+            <a:srgbClr val="EEF2FB"/>
+          </a:solidFill>
+          <a:ln/>
+        </p:spPr>
+      </p:sp>
+      <p:sp>
+        <p:nvSpPr>
+          <p:cNvPr id="11" name="Text 9"/>
+          <p:cNvSpPr txBox="1"/>
+          <p:nvPr/>
+        </p:nvSpPr>
+        <p:spPr>
+          <a:xfrm>
+            <a:off x="777240" y="2295144"/>
+            <a:ext cx="438912" cy="438912"/>
+          </a:xfrm>
+          <a:prstGeom prst="rect">
+            <a:avLst/>
+          </a:prstGeom>
+          <a:noFill/>
+          <a:ln/>
+        </p:spPr>
+        <p:txBody>
+          <a:bodyPr wrap="square" lIns="0" tIns="0" rIns="0" bIns="0" rtlCol="0" anchor="ctr"/>
+          <a:lstStyle/>
+          <a:p>
+            <a:pPr algn="ctr" indent="0" marL="0">
+              <a:buNone/>
+            </a:pPr>
+            <a:r>
+              <a:rPr lang="en-US" sz="1300" b="1" dirty="0">
+                <a:solidFill>
+                  <a:srgbClr val="2D63FF"/>
+                </a:solidFill>
+                <a:latin typeface="IBM Plex Mono" pitchFamily="34" charset="0"/>
+                <a:ea typeface="IBM Plex Mono" pitchFamily="34" charset="-122"/>
+                <a:cs typeface="IBM Plex Mono" pitchFamily="34" charset="-120"/>
+              </a:rPr>
+              <a:t>A</a:t>
+            </a:r>
+            <a:endParaRPr lang="en-US" sz="1300" dirty="0"/>
+          </a:p>
+        </p:txBody>
+      </p:sp>
+      <p:sp>
+        <p:nvSpPr>
+          <p:cNvPr id="12" name="Text 10"/>
+          <p:cNvSpPr txBox="1"/>
+          <p:nvPr/>
+        </p:nvSpPr>
+        <p:spPr>
+          <a:xfrm>
+            <a:off x="1417320" y="2148840"/>
+            <a:ext cx="10058400" cy="731520"/>
           </a:xfrm>
           <a:prstGeom prst="rect">
             <a:avLst/>
@@ -3091,12 +3289,12 @@
           <a:p>
             <a:pPr indent="0" marL="0">
               <a:lnSpc>
-                <a:spcPct val="130000"/>
+                <a:spcPct val="115000"/>
               </a:lnSpc>
               <a:buNone/>
             </a:pPr>
             <a:r>
-              <a:rPr lang="en-US" sz="2200" dirty="0">
+              <a:rPr lang="en-US" sz="1700" dirty="0">
                 <a:solidFill>
                   <a:srgbClr val="101828"/>
                 </a:solidFill>
@@ -3104,22 +3302,110 @@
                 <a:ea typeface="IBM Plex Sans" pitchFamily="34" charset="-122"/>
                 <a:cs typeface="IBM Plex Sans" pitchFamily="34" charset="-120"/>
               </a:rPr>
-              <a:t>Six lines of the OCR Exam Reference Language, jumbled. Tap the star and put them into a working program that keeps rolling a dice until it rolls a six, then outputs how many rolls that took.</a:t>
-            </a:r>
-            <a:endParaRPr lang="en-US" sz="2200" dirty="0"/>
-          </a:p>
-        </p:txBody>
-      </p:sp>
-      <p:sp>
-        <p:nvSpPr>
-          <p:cNvPr id="10" name="Text 8"/>
-          <p:cNvSpPr txBox="1"/>
-          <p:nvPr/>
-        </p:nvSpPr>
-        <p:spPr>
-          <a:xfrm>
-            <a:off x="502920" y="4526280"/>
-            <a:ext cx="11155680" cy="457200"/>
+              <a:t>They are chosen by the user rather than by the program</a:t>
+            </a:r>
+            <a:endParaRPr lang="en-US" sz="1700" dirty="0"/>
+          </a:p>
+        </p:txBody>
+      </p:sp>
+      <p:sp>
+        <p:nvSpPr>
+          <p:cNvPr id="13" name="Shape 11"/>
+          <p:cNvSpPr/>
+          <p:nvPr/>
+        </p:nvSpPr>
+        <p:spPr>
+          <a:xfrm>
+            <a:off x="502920" y="3017520"/>
+            <a:ext cx="11155680" cy="731520"/>
+          </a:xfrm>
+          <a:prstGeom prst="roundRect">
+            <a:avLst>
+              <a:gd name="adj" fmla="val 15000"/>
+            </a:avLst>
+          </a:prstGeom>
+          <a:solidFill>
+            <a:srgbClr val="FFFFFF"/>
+          </a:solidFill>
+          <a:ln w="15875">
+            <a:solidFill>
+              <a:srgbClr val="D9DEE7"/>
+            </a:solidFill>
+            <a:prstDash val="solid"/>
+          </a:ln>
+        </p:spPr>
+      </p:sp>
+      <p:sp>
+        <p:nvSpPr>
+          <p:cNvPr id="14" name="Shape 12"/>
+          <p:cNvSpPr/>
+          <p:nvPr/>
+        </p:nvSpPr>
+        <p:spPr>
+          <a:xfrm>
+            <a:off x="777240" y="3163824"/>
+            <a:ext cx="438912" cy="438912"/>
+          </a:xfrm>
+          <a:prstGeom prst="roundRect">
+            <a:avLst>
+              <a:gd name="adj" fmla="val 20833"/>
+            </a:avLst>
+          </a:prstGeom>
+          <a:solidFill>
+            <a:srgbClr val="EEF2FB"/>
+          </a:solidFill>
+          <a:ln/>
+        </p:spPr>
+      </p:sp>
+      <p:sp>
+        <p:nvSpPr>
+          <p:cNvPr id="15" name="Text 13"/>
+          <p:cNvSpPr txBox="1"/>
+          <p:nvPr/>
+        </p:nvSpPr>
+        <p:spPr>
+          <a:xfrm>
+            <a:off x="777240" y="3163824"/>
+            <a:ext cx="438912" cy="438912"/>
+          </a:xfrm>
+          <a:prstGeom prst="rect">
+            <a:avLst/>
+          </a:prstGeom>
+          <a:noFill/>
+          <a:ln/>
+        </p:spPr>
+        <p:txBody>
+          <a:bodyPr wrap="square" lIns="0" tIns="0" rIns="0" bIns="0" rtlCol="0" anchor="ctr"/>
+          <a:lstStyle/>
+          <a:p>
+            <a:pPr algn="ctr" indent="0" marL="0">
+              <a:buNone/>
+            </a:pPr>
+            <a:r>
+              <a:rPr lang="en-US" sz="1300" b="1" dirty="0">
+                <a:solidFill>
+                  <a:srgbClr val="2D63FF"/>
+                </a:solidFill>
+                <a:latin typeface="IBM Plex Mono" pitchFamily="34" charset="0"/>
+                <a:ea typeface="IBM Plex Mono" pitchFamily="34" charset="-122"/>
+                <a:cs typeface="IBM Plex Mono" pitchFamily="34" charset="-120"/>
+              </a:rPr>
+              <a:t>B</a:t>
+            </a:r>
+            <a:endParaRPr lang="en-US" sz="1300" dirty="0"/>
+          </a:p>
+        </p:txBody>
+      </p:sp>
+      <p:sp>
+        <p:nvSpPr>
+          <p:cNvPr id="16" name="Text 14"/>
+          <p:cNvSpPr txBox="1"/>
+          <p:nvPr/>
+        </p:nvSpPr>
+        <p:spPr>
+          <a:xfrm>
+            <a:off x="1417320" y="3017520"/>
+            <a:ext cx="10058400" cy="731520"/>
           </a:xfrm>
           <a:prstGeom prst="rect">
             <a:avLst/>
@@ -3132,20 +3418,283 @@
           <a:lstStyle/>
           <a:p>
             <a:pPr indent="0" marL="0">
-              <a:buNone/>
-            </a:pPr>
-            <a:r>
-              <a:rPr lang="en-US" sz="1600" dirty="0">
-                <a:solidFill>
-                  <a:srgbClr val="667085"/>
+              <a:lnSpc>
+                <a:spcPct val="115000"/>
+              </a:lnSpc>
+              <a:buNone/>
+            </a:pPr>
+            <a:r>
+              <a:rPr lang="en-US" sz="1700" dirty="0">
+                <a:solidFill>
+                  <a:srgbClr val="101828"/>
                 </a:solidFill>
                 <a:latin typeface="IBM Plex Sans" pitchFamily="34" charset="0"/>
                 <a:ea typeface="IBM Plex Sans" pitchFamily="34" charset="-122"/>
                 <a:cs typeface="IBM Plex Sans" pitchFamily="34" charset="-120"/>
               </a:rPr>
-              <a:t>Predict on paper first, then look down and test it.</a:t>
-            </a:r>
-            <a:endParaRPr lang="en-US" sz="1600" dirty="0"/>
+              <a:t>They are worked out by an algorithm, so they are not truly unpredictable</a:t>
+            </a:r>
+            <a:endParaRPr lang="en-US" sz="1700" dirty="0"/>
+          </a:p>
+        </p:txBody>
+      </p:sp>
+      <p:sp>
+        <p:nvSpPr>
+          <p:cNvPr id="17" name="Shape 15"/>
+          <p:cNvSpPr/>
+          <p:nvPr/>
+        </p:nvSpPr>
+        <p:spPr>
+          <a:xfrm>
+            <a:off x="502920" y="3886200"/>
+            <a:ext cx="11155680" cy="731520"/>
+          </a:xfrm>
+          <a:prstGeom prst="roundRect">
+            <a:avLst>
+              <a:gd name="adj" fmla="val 15000"/>
+            </a:avLst>
+          </a:prstGeom>
+          <a:solidFill>
+            <a:srgbClr val="FFFFFF"/>
+          </a:solidFill>
+          <a:ln w="15875">
+            <a:solidFill>
+              <a:srgbClr val="D9DEE7"/>
+            </a:solidFill>
+            <a:prstDash val="solid"/>
+          </a:ln>
+        </p:spPr>
+      </p:sp>
+      <p:sp>
+        <p:nvSpPr>
+          <p:cNvPr id="18" name="Shape 16"/>
+          <p:cNvSpPr/>
+          <p:nvPr/>
+        </p:nvSpPr>
+        <p:spPr>
+          <a:xfrm>
+            <a:off x="777240" y="4032504"/>
+            <a:ext cx="438912" cy="438912"/>
+          </a:xfrm>
+          <a:prstGeom prst="roundRect">
+            <a:avLst>
+              <a:gd name="adj" fmla="val 20833"/>
+            </a:avLst>
+          </a:prstGeom>
+          <a:solidFill>
+            <a:srgbClr val="EEF2FB"/>
+          </a:solidFill>
+          <a:ln/>
+        </p:spPr>
+      </p:sp>
+      <p:sp>
+        <p:nvSpPr>
+          <p:cNvPr id="19" name="Text 17"/>
+          <p:cNvSpPr txBox="1"/>
+          <p:nvPr/>
+        </p:nvSpPr>
+        <p:spPr>
+          <a:xfrm>
+            <a:off x="777240" y="4032504"/>
+            <a:ext cx="438912" cy="438912"/>
+          </a:xfrm>
+          <a:prstGeom prst="rect">
+            <a:avLst/>
+          </a:prstGeom>
+          <a:noFill/>
+          <a:ln/>
+        </p:spPr>
+        <p:txBody>
+          <a:bodyPr wrap="square" lIns="0" tIns="0" rIns="0" bIns="0" rtlCol="0" anchor="ctr"/>
+          <a:lstStyle/>
+          <a:p>
+            <a:pPr algn="ctr" indent="0" marL="0">
+              <a:buNone/>
+            </a:pPr>
+            <a:r>
+              <a:rPr lang="en-US" sz="1300" b="1" dirty="0">
+                <a:solidFill>
+                  <a:srgbClr val="2D63FF"/>
+                </a:solidFill>
+                <a:latin typeface="IBM Plex Mono" pitchFamily="34" charset="0"/>
+                <a:ea typeface="IBM Plex Mono" pitchFamily="34" charset="-122"/>
+                <a:cs typeface="IBM Plex Mono" pitchFamily="34" charset="-120"/>
+              </a:rPr>
+              <a:t>C</a:t>
+            </a:r>
+            <a:endParaRPr lang="en-US" sz="1300" dirty="0"/>
+          </a:p>
+        </p:txBody>
+      </p:sp>
+      <p:sp>
+        <p:nvSpPr>
+          <p:cNvPr id="20" name="Text 18"/>
+          <p:cNvSpPr txBox="1"/>
+          <p:nvPr/>
+        </p:nvSpPr>
+        <p:spPr>
+          <a:xfrm>
+            <a:off x="1417320" y="3886200"/>
+            <a:ext cx="10058400" cy="731520"/>
+          </a:xfrm>
+          <a:prstGeom prst="rect">
+            <a:avLst/>
+          </a:prstGeom>
+          <a:noFill/>
+          <a:ln/>
+        </p:spPr>
+        <p:txBody>
+          <a:bodyPr wrap="square" lIns="0" tIns="0" rIns="0" bIns="0" rtlCol="0" anchor="ctr"/>
+          <a:lstStyle/>
+          <a:p>
+            <a:pPr indent="0" marL="0">
+              <a:lnSpc>
+                <a:spcPct val="115000"/>
+              </a:lnSpc>
+              <a:buNone/>
+            </a:pPr>
+            <a:r>
+              <a:rPr lang="en-US" sz="1700" dirty="0">
+                <a:solidFill>
+                  <a:srgbClr val="101828"/>
+                </a:solidFill>
+                <a:latin typeface="IBM Plex Sans" pitchFamily="34" charset="0"/>
+                <a:ea typeface="IBM Plex Sans" pitchFamily="34" charset="-122"/>
+                <a:cs typeface="IBM Plex Sans" pitchFamily="34" charset="-120"/>
+              </a:rPr>
+              <a:t>They are always the same number</a:t>
+            </a:r>
+            <a:endParaRPr lang="en-US" sz="1700" dirty="0"/>
+          </a:p>
+        </p:txBody>
+      </p:sp>
+      <p:sp>
+        <p:nvSpPr>
+          <p:cNvPr id="21" name="Shape 19"/>
+          <p:cNvSpPr/>
+          <p:nvPr/>
+        </p:nvSpPr>
+        <p:spPr>
+          <a:xfrm>
+            <a:off x="502920" y="4754880"/>
+            <a:ext cx="11155680" cy="731520"/>
+          </a:xfrm>
+          <a:prstGeom prst="roundRect">
+            <a:avLst>
+              <a:gd name="adj" fmla="val 15000"/>
+            </a:avLst>
+          </a:prstGeom>
+          <a:solidFill>
+            <a:srgbClr val="FFFFFF"/>
+          </a:solidFill>
+          <a:ln w="15875">
+            <a:solidFill>
+              <a:srgbClr val="D9DEE7"/>
+            </a:solidFill>
+            <a:prstDash val="solid"/>
+          </a:ln>
+        </p:spPr>
+      </p:sp>
+      <p:sp>
+        <p:nvSpPr>
+          <p:cNvPr id="22" name="Shape 20"/>
+          <p:cNvSpPr/>
+          <p:nvPr/>
+        </p:nvSpPr>
+        <p:spPr>
+          <a:xfrm>
+            <a:off x="777240" y="4901184"/>
+            <a:ext cx="438912" cy="438912"/>
+          </a:xfrm>
+          <a:prstGeom prst="roundRect">
+            <a:avLst>
+              <a:gd name="adj" fmla="val 20833"/>
+            </a:avLst>
+          </a:prstGeom>
+          <a:solidFill>
+            <a:srgbClr val="EEF2FB"/>
+          </a:solidFill>
+          <a:ln/>
+        </p:spPr>
+      </p:sp>
+      <p:sp>
+        <p:nvSpPr>
+          <p:cNvPr id="23" name="Text 21"/>
+          <p:cNvSpPr txBox="1"/>
+          <p:nvPr/>
+        </p:nvSpPr>
+        <p:spPr>
+          <a:xfrm>
+            <a:off x="777240" y="4901184"/>
+            <a:ext cx="438912" cy="438912"/>
+          </a:xfrm>
+          <a:prstGeom prst="rect">
+            <a:avLst/>
+          </a:prstGeom>
+          <a:noFill/>
+          <a:ln/>
+        </p:spPr>
+        <p:txBody>
+          <a:bodyPr wrap="square" lIns="0" tIns="0" rIns="0" bIns="0" rtlCol="0" anchor="ctr"/>
+          <a:lstStyle/>
+          <a:p>
+            <a:pPr algn="ctr" indent="0" marL="0">
+              <a:buNone/>
+            </a:pPr>
+            <a:r>
+              <a:rPr lang="en-US" sz="1300" b="1" dirty="0">
+                <a:solidFill>
+                  <a:srgbClr val="2D63FF"/>
+                </a:solidFill>
+                <a:latin typeface="IBM Plex Mono" pitchFamily="34" charset="0"/>
+                <a:ea typeface="IBM Plex Mono" pitchFamily="34" charset="-122"/>
+                <a:cs typeface="IBM Plex Mono" pitchFamily="34" charset="-120"/>
+              </a:rPr>
+              <a:t>D</a:t>
+            </a:r>
+            <a:endParaRPr lang="en-US" sz="1300" dirty="0"/>
+          </a:p>
+        </p:txBody>
+      </p:sp>
+      <p:sp>
+        <p:nvSpPr>
+          <p:cNvPr id="24" name="Text 22"/>
+          <p:cNvSpPr txBox="1"/>
+          <p:nvPr/>
+        </p:nvSpPr>
+        <p:spPr>
+          <a:xfrm>
+            <a:off x="1417320" y="4754880"/>
+            <a:ext cx="10058400" cy="731520"/>
+          </a:xfrm>
+          <a:prstGeom prst="rect">
+            <a:avLst/>
+          </a:prstGeom>
+          <a:noFill/>
+          <a:ln/>
+        </p:spPr>
+        <p:txBody>
+          <a:bodyPr wrap="square" lIns="0" tIns="0" rIns="0" bIns="0" rtlCol="0" anchor="ctr"/>
+          <a:lstStyle/>
+          <a:p>
+            <a:pPr indent="0" marL="0">
+              <a:lnSpc>
+                <a:spcPct val="115000"/>
+              </a:lnSpc>
+              <a:buNone/>
+            </a:pPr>
+            <a:r>
+              <a:rPr lang="en-US" sz="1700" dirty="0">
+                <a:solidFill>
+                  <a:srgbClr val="101828"/>
+                </a:solidFill>
+                <a:latin typeface="IBM Plex Sans" pitchFamily="34" charset="0"/>
+                <a:ea typeface="IBM Plex Sans" pitchFamily="34" charset="-122"/>
+                <a:cs typeface="IBM Plex Sans" pitchFamily="34" charset="-120"/>
+              </a:rPr>
+              <a:t>They can only ever be between 0 and 1</a:t>
+            </a:r>
+            <a:endParaRPr lang="en-US" sz="1700" dirty="0"/>
           </a:p>
         </p:txBody>
       </p:sp>
@@ -3281,14 +3830,75 @@
       </p:sp>
       <p:sp>
         <p:nvSpPr>
-          <p:cNvPr id="5" name="Text 3"/>
-          <p:cNvSpPr txBox="1"/>
-          <p:nvPr/>
-        </p:nvSpPr>
-        <p:spPr>
-          <a:xfrm>
-            <a:off x="502920" y="411480"/>
-            <a:ext cx="11155680" cy="777240"/>
+          <p:cNvPr id="5" name="Shape 3"/>
+          <p:cNvSpPr/>
+          <p:nvPr/>
+        </p:nvSpPr>
+        <p:spPr>
+          <a:xfrm>
+            <a:off x="502920" y="438912"/>
+            <a:ext cx="3108960" cy="502920"/>
+          </a:xfrm>
+          <a:prstGeom prst="roundRect">
+            <a:avLst>
+              <a:gd name="adj" fmla="val 18182"/>
+            </a:avLst>
+          </a:prstGeom>
+          <a:solidFill>
+            <a:srgbClr val="F4B942"/>
+          </a:solidFill>
+          <a:ln/>
+        </p:spPr>
+      </p:sp>
+      <p:sp>
+        <p:nvSpPr>
+          <p:cNvPr id="6" name="Text 4"/>
+          <p:cNvSpPr txBox="1"/>
+          <p:nvPr/>
+        </p:nvSpPr>
+        <p:spPr>
+          <a:xfrm>
+            <a:off x="502920" y="438912"/>
+            <a:ext cx="3108960" cy="502920"/>
+          </a:xfrm>
+          <a:prstGeom prst="rect">
+            <a:avLst/>
+          </a:prstGeom>
+          <a:noFill/>
+          <a:ln/>
+        </p:spPr>
+        <p:txBody>
+          <a:bodyPr wrap="square" lIns="0" tIns="0" rIns="0" bIns="0" rtlCol="0" anchor="ctr"/>
+          <a:lstStyle/>
+          <a:p>
+            <a:pPr algn="ctr" indent="0" marL="0">
+              <a:buNone/>
+            </a:pPr>
+            <a:r>
+              <a:rPr lang="en-US" sz="1300" b="1" dirty="0">
+                <a:solidFill>
+                  <a:srgbClr val="101828"/>
+                </a:solidFill>
+                <a:latin typeface="IBM Plex Mono" pitchFamily="34" charset="0"/>
+                <a:ea typeface="IBM Plex Mono" pitchFamily="34" charset="-122"/>
+                <a:cs typeface="IBM Plex Mono" pitchFamily="34" charset="-120"/>
+              </a:rPr>
+              <a:t>★  FINAL CHALLENGE</a:t>
+            </a:r>
+            <a:endParaRPr lang="en-US" sz="1300" dirty="0"/>
+          </a:p>
+        </p:txBody>
+      </p:sp>
+      <p:sp>
+        <p:nvSpPr>
+          <p:cNvPr id="7" name="Text 5"/>
+          <p:cNvSpPr txBox="1"/>
+          <p:nvPr/>
+        </p:nvSpPr>
+        <p:spPr>
+          <a:xfrm>
+            <a:off x="502920" y="1097280"/>
+            <a:ext cx="11155680" cy="731520"/>
           </a:xfrm>
           <a:prstGeom prst="rect">
             <a:avLst/>
@@ -3304,7 +3914,7 @@
               <a:buNone/>
             </a:pPr>
             <a:r>
-              <a:rPr lang="en-US" sz="3200" b="1" dirty="0">
+              <a:rPr lang="en-US" sz="3400" b="1" dirty="0">
                 <a:solidFill>
                   <a:srgbClr val="101828"/>
                 </a:solidFill>
@@ -3312,65 +3922,26 @@
                 <a:ea typeface="IBM Plex Sans" pitchFamily="34" charset="-122"/>
                 <a:cs typeface="IBM Plex Sans" pitchFamily="34" charset="-120"/>
               </a:rPr>
-              <a:t>Worth knowing</a:t>
-            </a:r>
-            <a:endParaRPr lang="en-US" sz="3200" dirty="0"/>
-          </a:p>
-        </p:txBody>
-      </p:sp>
-      <p:sp>
-        <p:nvSpPr>
-          <p:cNvPr id="6" name="Text 4"/>
-          <p:cNvSpPr txBox="1"/>
-          <p:nvPr/>
-        </p:nvSpPr>
-        <p:spPr>
-          <a:xfrm>
-            <a:off x="502920" y="1170432"/>
-            <a:ext cx="11155680" cy="411480"/>
-          </a:xfrm>
-          <a:prstGeom prst="rect">
-            <a:avLst/>
-          </a:prstGeom>
-          <a:noFill/>
-          <a:ln/>
-        </p:spPr>
-        <p:txBody>
-          <a:bodyPr wrap="square" lIns="0" tIns="0" rIns="0" bIns="0" rtlCol="0" anchor="ctr"/>
-          <a:lstStyle/>
-          <a:p>
-            <a:pPr indent="0" marL="0">
-              <a:buNone/>
-            </a:pPr>
-            <a:r>
-              <a:rPr lang="en-US" sz="1500" dirty="0">
-                <a:solidFill>
-                  <a:srgbClr val="667085"/>
-                </a:solidFill>
-                <a:latin typeface="IBM Plex Sans" pitchFamily="34" charset="0"/>
-                <a:ea typeface="IBM Plex Sans" pitchFamily="34" charset="-122"/>
-                <a:cs typeface="IBM Plex Sans" pitchFamily="34" charset="-120"/>
-              </a:rPr>
-              <a:t>The information markers dotted around the room</a:t>
-            </a:r>
-            <a:endParaRPr lang="en-US" sz="1500" dirty="0"/>
-          </a:p>
-        </p:txBody>
-      </p:sp>
-      <p:sp>
-        <p:nvSpPr>
-          <p:cNvPr id="7" name="Shape 5"/>
+              <a:t>How many rolls</a:t>
+            </a:r>
+            <a:endParaRPr lang="en-US" sz="3400" dirty="0"/>
+          </a:p>
+        </p:txBody>
+      </p:sp>
+      <p:sp>
+        <p:nvSpPr>
+          <p:cNvPr id="8" name="Shape 6"/>
           <p:cNvSpPr/>
           <p:nvPr/>
         </p:nvSpPr>
         <p:spPr>
           <a:xfrm>
-            <a:off x="502920" y="1828800"/>
-            <a:ext cx="5394960" cy="1737360"/>
+            <a:off x="502920" y="2011680"/>
+            <a:ext cx="11155680" cy="2194560"/>
           </a:xfrm>
           <a:prstGeom prst="roundRect">
             <a:avLst>
-              <a:gd name="adj" fmla="val 6316"/>
+              <a:gd name="adj" fmla="val 5000"/>
             </a:avLst>
           </a:prstGeom>
           <a:solidFill>
@@ -3386,14 +3957,14 @@
       </p:sp>
       <p:sp>
         <p:nvSpPr>
-          <p:cNvPr id="8" name="Text 6"/>
-          <p:cNvSpPr txBox="1"/>
-          <p:nvPr/>
-        </p:nvSpPr>
-        <p:spPr>
-          <a:xfrm>
-            <a:off x="822960" y="2011680"/>
-            <a:ext cx="4754880" cy="365760"/>
+          <p:cNvPr id="9" name="Text 7"/>
+          <p:cNvSpPr txBox="1"/>
+          <p:nvPr/>
+        </p:nvSpPr>
+        <p:spPr>
+          <a:xfrm>
+            <a:off x="1005840" y="2331720"/>
+            <a:ext cx="10149840" cy="1554480"/>
           </a:xfrm>
           <a:prstGeom prst="rect">
             <a:avLst/>
@@ -3406,52 +3977,52 @@
           <a:lstStyle/>
           <a:p>
             <a:pPr indent="0" marL="0">
-              <a:buNone/>
-            </a:pPr>
-            <a:r>
-              <a:rPr lang="en-US" sz="1600" b="1" dirty="0">
-                <a:solidFill>
-                  <a:srgbClr val="2D63FF"/>
+              <a:lnSpc>
+                <a:spcPct val="130000"/>
+              </a:lnSpc>
+              <a:buNone/>
+            </a:pPr>
+            <a:r>
+              <a:rPr lang="en-US" sz="2200" dirty="0">
+                <a:solidFill>
+                  <a:srgbClr val="101828"/>
                 </a:solidFill>
                 <a:latin typeface="IBM Plex Sans" pitchFamily="34" charset="0"/>
                 <a:ea typeface="IBM Plex Sans" pitchFamily="34" charset="-122"/>
                 <a:cs typeface="IBM Plex Sans" pitchFamily="34" charset="-120"/>
               </a:rPr>
-              <a:t>Nothing is truly random</a:t>
-            </a:r>
-            <a:endParaRPr lang="en-US" sz="1600" dirty="0"/>
-          </a:p>
-        </p:txBody>
-      </p:sp>
-      <p:sp>
-        <p:nvSpPr>
-          <p:cNvPr id="9" name="Text 7"/>
-          <p:cNvSpPr txBox="1"/>
-          <p:nvPr/>
-        </p:nvSpPr>
-        <p:spPr>
-          <a:xfrm>
-            <a:off x="822960" y="2395728"/>
-            <a:ext cx="4754880" cy="1005840"/>
-          </a:xfrm>
-          <a:prstGeom prst="rect">
-            <a:avLst/>
-          </a:prstGeom>
-          <a:noFill/>
-          <a:ln/>
-        </p:spPr>
-        <p:txBody>
-          <a:bodyPr wrap="square" lIns="0" tIns="0" rIns="0" bIns="0" rtlCol="0" anchor="t"/>
+              <a:t>Six lines of the OCR Exam Reference Language, jumbled. Tap the star and put them into a working program that keeps rolling a dice until it rolls a six, then outputs how many rolls that took.</a:t>
+            </a:r>
+            <a:endParaRPr lang="en-US" sz="2200" dirty="0"/>
+          </a:p>
+        </p:txBody>
+      </p:sp>
+      <p:sp>
+        <p:nvSpPr>
+          <p:cNvPr id="10" name="Text 8"/>
+          <p:cNvSpPr txBox="1"/>
+          <p:nvPr/>
+        </p:nvSpPr>
+        <p:spPr>
+          <a:xfrm>
+            <a:off x="502920" y="4526280"/>
+            <a:ext cx="11155680" cy="457200"/>
+          </a:xfrm>
+          <a:prstGeom prst="rect">
+            <a:avLst/>
+          </a:prstGeom>
+          <a:noFill/>
+          <a:ln/>
+        </p:spPr>
+        <p:txBody>
+          <a:bodyPr wrap="square" lIns="0" tIns="0" rIns="0" bIns="0" rtlCol="0" anchor="ctr"/>
           <a:lstStyle/>
           <a:p>
             <a:pPr indent="0" marL="0">
-              <a:lnSpc>
-                <a:spcPct val="120000"/>
-              </a:lnSpc>
-              <a:buNone/>
-            </a:pPr>
-            <a:r>
-              <a:rPr lang="en-US" sz="1300" dirty="0">
+              <a:buNone/>
+            </a:pPr>
+            <a:r>
+              <a:rPr lang="en-US" sz="1600" dirty="0">
                 <a:solidFill>
                   <a:srgbClr val="667085"/>
                 </a:solidFill>
@@ -3459,333 +4030,9 @@
                 <a:ea typeface="IBM Plex Sans" pitchFamily="34" charset="-122"/>
                 <a:cs typeface="IBM Plex Sans" pitchFamily="34" charset="-120"/>
               </a:rPr>
-              <a:t>A dice is not really unpredictable. Thrown exactly the same way through exactly the same air it would land the same, but the detail is far beyond us, so we call it random. A program's random numbers rest on the same idea.</a:t>
-            </a:r>
-            <a:endParaRPr lang="en-US" sz="1300" dirty="0"/>
-          </a:p>
-        </p:txBody>
-      </p:sp>
-      <p:sp>
-        <p:nvSpPr>
-          <p:cNvPr id="10" name="Shape 8"/>
-          <p:cNvSpPr/>
-          <p:nvPr/>
-        </p:nvSpPr>
-        <p:spPr>
-          <a:xfrm>
-            <a:off x="6217920" y="1828800"/>
-            <a:ext cx="5394960" cy="1737360"/>
-          </a:xfrm>
-          <a:prstGeom prst="roundRect">
-            <a:avLst>
-              <a:gd name="adj" fmla="val 6316"/>
-            </a:avLst>
-          </a:prstGeom>
-          <a:solidFill>
-            <a:srgbClr val="FFFFFF"/>
-          </a:solidFill>
-          <a:ln w="15875">
-            <a:solidFill>
-              <a:srgbClr val="08A6A6"/>
-            </a:solidFill>
-            <a:prstDash val="solid"/>
-          </a:ln>
-        </p:spPr>
-      </p:sp>
-      <p:sp>
-        <p:nvSpPr>
-          <p:cNvPr id="11" name="Text 9"/>
-          <p:cNvSpPr txBox="1"/>
-          <p:nvPr/>
-        </p:nvSpPr>
-        <p:spPr>
-          <a:xfrm>
-            <a:off x="6537960" y="2011680"/>
-            <a:ext cx="4754880" cy="365760"/>
-          </a:xfrm>
-          <a:prstGeom prst="rect">
-            <a:avLst/>
-          </a:prstGeom>
-          <a:noFill/>
-          <a:ln/>
-        </p:spPr>
-        <p:txBody>
-          <a:bodyPr wrap="square" lIns="0" tIns="0" rIns="0" bIns="0" rtlCol="0" anchor="ctr"/>
-          <a:lstStyle/>
-          <a:p>
-            <a:pPr indent="0" marL="0">
-              <a:buNone/>
-            </a:pPr>
-            <a:r>
-              <a:rPr lang="en-US" sz="1600" b="1" dirty="0">
-                <a:solidFill>
-                  <a:srgbClr val="08A6A6"/>
-                </a:solidFill>
-                <a:latin typeface="IBM Plex Sans" pitchFamily="34" charset="0"/>
-                <a:ea typeface="IBM Plex Sans" pitchFamily="34" charset="-122"/>
-                <a:cs typeface="IBM Plex Sans" pitchFamily="34" charset="-120"/>
-              </a:rPr>
-              <a:t>Read the brackets first</a:t>
+              <a:t>Predict on paper first, then look down and test it.</a:t>
             </a:r>
             <a:endParaRPr lang="en-US" sz="1600" dirty="0"/>
-          </a:p>
-        </p:txBody>
-      </p:sp>
-      <p:sp>
-        <p:nvSpPr>
-          <p:cNvPr id="12" name="Text 10"/>
-          <p:cNvSpPr txBox="1"/>
-          <p:nvPr/>
-        </p:nvSpPr>
-        <p:spPr>
-          <a:xfrm>
-            <a:off x="6537960" y="2395728"/>
-            <a:ext cx="4754880" cy="1005840"/>
-          </a:xfrm>
-          <a:prstGeom prst="rect">
-            <a:avLst/>
-          </a:prstGeom>
-          <a:noFill/>
-          <a:ln/>
-        </p:spPr>
-        <p:txBody>
-          <a:bodyPr wrap="square" lIns="0" tIns="0" rIns="0" bIns="0" rtlCol="0" anchor="t"/>
-          <a:lstStyle/>
-          <a:p>
-            <a:pPr indent="0" marL="0">
-              <a:lnSpc>
-                <a:spcPct val="120000"/>
-              </a:lnSpc>
-              <a:buNone/>
-            </a:pPr>
-            <a:r>
-              <a:rPr lang="en-US" sz="1300" dirty="0">
-                <a:solidFill>
-                  <a:srgbClr val="667085"/>
-                </a:solidFill>
-                <a:latin typeface="IBM Plex Sans" pitchFamily="34" charset="0"/>
-                <a:ea typeface="IBM Plex Sans" pitchFamily="34" charset="-122"/>
-                <a:cs typeface="IBM Plex Sans" pitchFamily="34" charset="-120"/>
-              </a:rPr>
-              <a:t>In an exam question the two numbers in the brackets are most of the marks. Before you answer anything else, write down the lowest and the highest value that the call could possibly return.</a:t>
-            </a:r>
-            <a:endParaRPr lang="en-US" sz="1300" dirty="0"/>
-          </a:p>
-        </p:txBody>
-      </p:sp>
-      <p:sp>
-        <p:nvSpPr>
-          <p:cNvPr id="13" name="Shape 11"/>
-          <p:cNvSpPr/>
-          <p:nvPr/>
-        </p:nvSpPr>
-        <p:spPr>
-          <a:xfrm>
-            <a:off x="502920" y="3794760"/>
-            <a:ext cx="5394960" cy="1737360"/>
-          </a:xfrm>
-          <a:prstGeom prst="roundRect">
-            <a:avLst>
-              <a:gd name="adj" fmla="val 6316"/>
-            </a:avLst>
-          </a:prstGeom>
-          <a:solidFill>
-            <a:srgbClr val="FFFFFF"/>
-          </a:solidFill>
-          <a:ln w="15875">
-            <a:solidFill>
-              <a:srgbClr val="2D63FF"/>
-            </a:solidFill>
-            <a:prstDash val="solid"/>
-          </a:ln>
-        </p:spPr>
-      </p:sp>
-      <p:sp>
-        <p:nvSpPr>
-          <p:cNvPr id="14" name="Text 12"/>
-          <p:cNvSpPr txBox="1"/>
-          <p:nvPr/>
-        </p:nvSpPr>
-        <p:spPr>
-          <a:xfrm>
-            <a:off x="822960" y="3977640"/>
-            <a:ext cx="4754880" cy="365760"/>
-          </a:xfrm>
-          <a:prstGeom prst="rect">
-            <a:avLst/>
-          </a:prstGeom>
-          <a:noFill/>
-          <a:ln/>
-        </p:spPr>
-        <p:txBody>
-          <a:bodyPr wrap="square" lIns="0" tIns="0" rIns="0" bIns="0" rtlCol="0" anchor="ctr"/>
-          <a:lstStyle/>
-          <a:p>
-            <a:pPr indent="0" marL="0">
-              <a:buNone/>
-            </a:pPr>
-            <a:r>
-              <a:rPr lang="en-US" sz="1600" b="1" dirty="0">
-                <a:solidFill>
-                  <a:srgbClr val="2D63FF"/>
-                </a:solidFill>
-                <a:latin typeface="IBM Plex Sans" pitchFamily="34" charset="0"/>
-                <a:ea typeface="IBM Plex Sans" pitchFamily="34" charset="-122"/>
-                <a:cs typeface="IBM Plex Sans" pitchFamily="34" charset="-120"/>
-              </a:rPr>
-              <a:t>Off by one</a:t>
-            </a:r>
-            <a:endParaRPr lang="en-US" sz="1600" dirty="0"/>
-          </a:p>
-        </p:txBody>
-      </p:sp>
-      <p:sp>
-        <p:nvSpPr>
-          <p:cNvPr id="15" name="Text 13"/>
-          <p:cNvSpPr txBox="1"/>
-          <p:nvPr/>
-        </p:nvSpPr>
-        <p:spPr>
-          <a:xfrm>
-            <a:off x="822960" y="4361688"/>
-            <a:ext cx="4754880" cy="1005840"/>
-          </a:xfrm>
-          <a:prstGeom prst="rect">
-            <a:avLst/>
-          </a:prstGeom>
-          <a:noFill/>
-          <a:ln/>
-        </p:spPr>
-        <p:txBody>
-          <a:bodyPr wrap="square" lIns="0" tIns="0" rIns="0" bIns="0" rtlCol="0" anchor="t"/>
-          <a:lstStyle/>
-          <a:p>
-            <a:pPr indent="0" marL="0">
-              <a:lnSpc>
-                <a:spcPct val="120000"/>
-              </a:lnSpc>
-              <a:buNone/>
-            </a:pPr>
-            <a:r>
-              <a:rPr lang="en-US" sz="1300" dirty="0">
-                <a:solidFill>
-                  <a:srgbClr val="667085"/>
-                </a:solidFill>
-                <a:latin typeface="IBM Plex Sans" pitchFamily="34" charset="0"/>
-                <a:ea typeface="IBM Plex Sans" pitchFamily="34" charset="-122"/>
-                <a:cs typeface="IBM Plex Sans" pitchFamily="34" charset="-120"/>
-              </a:rPr>
-              <a:t>A range that is one too wide is one of the commonest bugs in programming. A random index that can equal the size of the array will crash the program eventually, but only on some runs, which makes it very hard to track down.</a:t>
-            </a:r>
-            <a:endParaRPr lang="en-US" sz="1300" dirty="0"/>
-          </a:p>
-        </p:txBody>
-      </p:sp>
-      <p:sp>
-        <p:nvSpPr>
-          <p:cNvPr id="16" name="Shape 14"/>
-          <p:cNvSpPr/>
-          <p:nvPr/>
-        </p:nvSpPr>
-        <p:spPr>
-          <a:xfrm>
-            <a:off x="6217920" y="3794760"/>
-            <a:ext cx="5394960" cy="1737360"/>
-          </a:xfrm>
-          <a:prstGeom prst="roundRect">
-            <a:avLst>
-              <a:gd name="adj" fmla="val 6316"/>
-            </a:avLst>
-          </a:prstGeom>
-          <a:solidFill>
-            <a:srgbClr val="FFFFFF"/>
-          </a:solidFill>
-          <a:ln w="15875">
-            <a:solidFill>
-              <a:srgbClr val="08A6A6"/>
-            </a:solidFill>
-            <a:prstDash val="solid"/>
-          </a:ln>
-        </p:spPr>
-      </p:sp>
-      <p:sp>
-        <p:nvSpPr>
-          <p:cNvPr id="17" name="Text 15"/>
-          <p:cNvSpPr txBox="1"/>
-          <p:nvPr/>
-        </p:nvSpPr>
-        <p:spPr>
-          <a:xfrm>
-            <a:off x="6537960" y="3977640"/>
-            <a:ext cx="4754880" cy="365760"/>
-          </a:xfrm>
-          <a:prstGeom prst="rect">
-            <a:avLst/>
-          </a:prstGeom>
-          <a:noFill/>
-          <a:ln/>
-        </p:spPr>
-        <p:txBody>
-          <a:bodyPr wrap="square" lIns="0" tIns="0" rIns="0" bIns="0" rtlCol="0" anchor="ctr"/>
-          <a:lstStyle/>
-          <a:p>
-            <a:pPr indent="0" marL="0">
-              <a:buNone/>
-            </a:pPr>
-            <a:r>
-              <a:rPr lang="en-US" sz="1600" b="1" dirty="0">
-                <a:solidFill>
-                  <a:srgbClr val="08A6A6"/>
-                </a:solidFill>
-                <a:latin typeface="IBM Plex Sans" pitchFamily="34" charset="0"/>
-                <a:ea typeface="IBM Plex Sans" pitchFamily="34" charset="-122"/>
-                <a:cs typeface="IBM Plex Sans" pitchFamily="34" charset="-120"/>
-              </a:rPr>
-              <a:t>Where the seed comes from</a:t>
-            </a:r>
-            <a:endParaRPr lang="en-US" sz="1600" dirty="0"/>
-          </a:p>
-        </p:txBody>
-      </p:sp>
-      <p:sp>
-        <p:nvSpPr>
-          <p:cNvPr id="18" name="Text 16"/>
-          <p:cNvSpPr txBox="1"/>
-          <p:nvPr/>
-        </p:nvSpPr>
-        <p:spPr>
-          <a:xfrm>
-            <a:off x="6537960" y="4361688"/>
-            <a:ext cx="4754880" cy="1005840"/>
-          </a:xfrm>
-          <a:prstGeom prst="rect">
-            <a:avLst/>
-          </a:prstGeom>
-          <a:noFill/>
-          <a:ln/>
-        </p:spPr>
-        <p:txBody>
-          <a:bodyPr wrap="square" lIns="0" tIns="0" rIns="0" bIns="0" rtlCol="0" anchor="t"/>
-          <a:lstStyle/>
-          <a:p>
-            <a:pPr indent="0" marL="0">
-              <a:lnSpc>
-                <a:spcPct val="120000"/>
-              </a:lnSpc>
-              <a:buNone/>
-            </a:pPr>
-            <a:r>
-              <a:rPr lang="en-US" sz="1300" dirty="0">
-                <a:solidFill>
-                  <a:srgbClr val="667085"/>
-                </a:solidFill>
-                <a:latin typeface="IBM Plex Sans" pitchFamily="34" charset="0"/>
-                <a:ea typeface="IBM Plex Sans" pitchFamily="34" charset="-122"/>
-                <a:cs typeface="IBM Plex Sans" pitchFamily="34" charset="-120"/>
-              </a:rPr>
-              <a:t>Most languages take the seed from the system clock, measured in tiny fractions of a second, so two runs almost never start from the same place. Setting the seed yourself gives the same sequence every time, which is exactly what a tester wants.</a:t>
-            </a:r>
-            <a:endParaRPr lang="en-US" sz="1300" dirty="0"/>
           </a:p>
         </p:txBody>
       </p:sp>
@@ -3952,7 +4199,7 @@
                 <a:ea typeface="IBM Plex Sans" pitchFamily="34" charset="-122"/>
                 <a:cs typeface="IBM Plex Sans" pitchFamily="34" charset="-120"/>
               </a:rPr>
-              <a:t>Exam practice</a:t>
+              <a:t>Worth knowing</a:t>
             </a:r>
             <a:endParaRPr lang="en-US" sz="3200" dirty="0"/>
           </a:p>
@@ -3991,7 +4238,7 @@
                 <a:ea typeface="IBM Plex Sans" pitchFamily="34" charset="-122"/>
                 <a:cs typeface="IBM Plex Sans" pitchFamily="34" charset="-120"/>
               </a:rPr>
-              <a:t>Devices away. Answer from memory on the worksheet.</a:t>
+              <a:t>The information markers dotted around the room</a:t>
             </a:r>
             <a:endParaRPr lang="en-US" sz="1500" dirty="0"/>
           </a:p>
@@ -4006,11 +4253,11 @@
         <p:spPr>
           <a:xfrm>
             <a:off x="502920" y="1828800"/>
-            <a:ext cx="11155680" cy="1097280"/>
+            <a:ext cx="5394960" cy="1737360"/>
           </a:xfrm>
           <a:prstGeom prst="roundRect">
             <a:avLst>
-              <a:gd name="adj" fmla="val 10000"/>
+              <a:gd name="adj" fmla="val 6316"/>
             </a:avLst>
           </a:prstGeom>
           <a:solidFill>
@@ -4018,7 +4265,7 @@
           </a:solidFill>
           <a:ln w="15875">
             <a:solidFill>
-              <a:srgbClr val="D9DEE7"/>
+              <a:srgbClr val="2D63FF"/>
             </a:solidFill>
             <a:prstDash val="solid"/>
           </a:ln>
@@ -4032,8 +4279,8 @@
         </p:nvSpPr>
         <p:spPr>
           <a:xfrm>
-            <a:off x="914400" y="1938528"/>
-            <a:ext cx="9418320" cy="877824"/>
+            <a:off x="822960" y="2011680"/>
+            <a:ext cx="4754880" cy="365760"/>
           </a:xfrm>
           <a:prstGeom prst="rect">
             <a:avLst/>
@@ -4046,101 +4293,79 @@
           <a:lstStyle/>
           <a:p>
             <a:pPr indent="0" marL="0">
-              <a:lnSpc>
-                <a:spcPct val="118000"/>
-              </a:lnSpc>
-              <a:buNone/>
-            </a:pPr>
-            <a:r>
-              <a:rPr lang="en-US" sz="1700" dirty="0">
-                <a:solidFill>
-                  <a:srgbClr val="101828"/>
+              <a:buNone/>
+            </a:pPr>
+            <a:r>
+              <a:rPr lang="en-US" sz="1600" b="1" dirty="0">
+                <a:solidFill>
+                  <a:srgbClr val="2D63FF"/>
                 </a:solidFill>
                 <a:latin typeface="IBM Plex Sans" pitchFamily="34" charset="0"/>
                 <a:ea typeface="IBM Plex Sans" pitchFamily="34" charset="-122"/>
                 <a:cs typeface="IBM Plex Sans" pitchFamily="34" charset="-120"/>
               </a:rPr>
-              <a:t>State two different reasons why a program might need a random number.</a:t>
-            </a:r>
-            <a:endParaRPr lang="en-US" sz="1700" dirty="0"/>
-          </a:p>
-        </p:txBody>
-      </p:sp>
-      <p:sp>
-        <p:nvSpPr>
-          <p:cNvPr id="9" name="Shape 7"/>
+              <a:t>Nothing is truly random</a:t>
+            </a:r>
+            <a:endParaRPr lang="en-US" sz="1600" dirty="0"/>
+          </a:p>
+        </p:txBody>
+      </p:sp>
+      <p:sp>
+        <p:nvSpPr>
+          <p:cNvPr id="9" name="Text 7"/>
+          <p:cNvSpPr txBox="1"/>
+          <p:nvPr/>
+        </p:nvSpPr>
+        <p:spPr>
+          <a:xfrm>
+            <a:off x="822960" y="2395728"/>
+            <a:ext cx="4754880" cy="1005840"/>
+          </a:xfrm>
+          <a:prstGeom prst="rect">
+            <a:avLst/>
+          </a:prstGeom>
+          <a:noFill/>
+          <a:ln/>
+        </p:spPr>
+        <p:txBody>
+          <a:bodyPr wrap="square" lIns="0" tIns="0" rIns="0" bIns="0" rtlCol="0" anchor="t"/>
+          <a:lstStyle/>
+          <a:p>
+            <a:pPr indent="0" marL="0">
+              <a:lnSpc>
+                <a:spcPct val="120000"/>
+              </a:lnSpc>
+              <a:buNone/>
+            </a:pPr>
+            <a:r>
+              <a:rPr lang="en-US" sz="1300" dirty="0">
+                <a:solidFill>
+                  <a:srgbClr val="667085"/>
+                </a:solidFill>
+                <a:latin typeface="IBM Plex Sans" pitchFamily="34" charset="0"/>
+                <a:ea typeface="IBM Plex Sans" pitchFamily="34" charset="-122"/>
+                <a:cs typeface="IBM Plex Sans" pitchFamily="34" charset="-120"/>
+              </a:rPr>
+              <a:t>A dice is not really unpredictable. Thrown exactly the same way through exactly the same air it would land the same, but the detail is far beyond us, so we call it random. A program's random numbers rest on the same idea.</a:t>
+            </a:r>
+            <a:endParaRPr lang="en-US" sz="1300" dirty="0"/>
+          </a:p>
+        </p:txBody>
+      </p:sp>
+      <p:sp>
+        <p:nvSpPr>
+          <p:cNvPr id="10" name="Shape 8"/>
           <p:cNvSpPr/>
           <p:nvPr/>
         </p:nvSpPr>
         <p:spPr>
           <a:xfrm>
-            <a:off x="10515600" y="2130552"/>
-            <a:ext cx="868680" cy="493776"/>
+            <a:off x="6217920" y="1828800"/>
+            <a:ext cx="5394960" cy="1737360"/>
           </a:xfrm>
           <a:prstGeom prst="roundRect">
             <a:avLst>
-              <a:gd name="adj" fmla="val 18519"/>
-            </a:avLst>
-          </a:prstGeom>
-          <a:solidFill>
-            <a:srgbClr val="EEF2FB"/>
-          </a:solidFill>
-          <a:ln/>
-        </p:spPr>
-      </p:sp>
-      <p:sp>
-        <p:nvSpPr>
-          <p:cNvPr id="10" name="Text 8"/>
-          <p:cNvSpPr txBox="1"/>
-          <p:nvPr/>
-        </p:nvSpPr>
-        <p:spPr>
-          <a:xfrm>
-            <a:off x="10515600" y="2130552"/>
-            <a:ext cx="868680" cy="493776"/>
-          </a:xfrm>
-          <a:prstGeom prst="rect">
-            <a:avLst/>
-          </a:prstGeom>
-          <a:noFill/>
-          <a:ln/>
-        </p:spPr>
-        <p:txBody>
-          <a:bodyPr wrap="square" lIns="0" tIns="0" rIns="0" bIns="0" rtlCol="0" anchor="ctr"/>
-          <a:lstStyle/>
-          <a:p>
-            <a:pPr algn="ctr" indent="0" marL="0">
-              <a:buNone/>
-            </a:pPr>
-            <a:r>
-              <a:rPr lang="en-US" sz="1500" b="1" dirty="0">
-                <a:solidFill>
-                  <a:srgbClr val="2D63FF"/>
-                </a:solidFill>
-                <a:latin typeface="IBM Plex Mono" pitchFamily="34" charset="0"/>
-                <a:ea typeface="IBM Plex Mono" pitchFamily="34" charset="-122"/>
-                <a:cs typeface="IBM Plex Mono" pitchFamily="34" charset="-120"/>
-              </a:rPr>
-              <a:t>[2]</a:t>
-            </a:r>
-            <a:endParaRPr lang="en-US" sz="1500" dirty="0"/>
-          </a:p>
-        </p:txBody>
-      </p:sp>
-      <p:sp>
-        <p:nvSpPr>
-          <p:cNvPr id="11" name="Shape 9"/>
-          <p:cNvSpPr/>
-          <p:nvPr/>
-        </p:nvSpPr>
-        <p:spPr>
-          <a:xfrm>
-            <a:off x="502920" y="3127248"/>
-            <a:ext cx="11155680" cy="1097280"/>
-          </a:xfrm>
-          <a:prstGeom prst="roundRect">
-            <a:avLst>
-              <a:gd name="adj" fmla="val 10000"/>
+              <a:gd name="adj" fmla="val 6316"/>
             </a:avLst>
           </a:prstGeom>
           <a:solidFill>
@@ -4148,7 +4373,7 @@
           </a:solidFill>
           <a:ln w="15875">
             <a:solidFill>
-              <a:srgbClr val="D9DEE7"/>
+              <a:srgbClr val="08A6A6"/>
             </a:solidFill>
             <a:prstDash val="solid"/>
           </a:ln>
@@ -4156,14 +4381,14 @@
       </p:sp>
       <p:sp>
         <p:nvSpPr>
-          <p:cNvPr id="12" name="Text 10"/>
-          <p:cNvSpPr txBox="1"/>
-          <p:nvPr/>
-        </p:nvSpPr>
-        <p:spPr>
-          <a:xfrm>
-            <a:off x="914400" y="3236976"/>
-            <a:ext cx="9418320" cy="877824"/>
+          <p:cNvPr id="11" name="Text 9"/>
+          <p:cNvSpPr txBox="1"/>
+          <p:nvPr/>
+        </p:nvSpPr>
+        <p:spPr>
+          <a:xfrm>
+            <a:off x="6537960" y="2011680"/>
+            <a:ext cx="4754880" cy="365760"/>
           </a:xfrm>
           <a:prstGeom prst="rect">
             <a:avLst/>
@@ -4176,23 +4401,62 @@
           <a:lstStyle/>
           <a:p>
             <a:pPr indent="0" marL="0">
-              <a:lnSpc>
-                <a:spcPct val="118000"/>
-              </a:lnSpc>
-              <a:buNone/>
-            </a:pPr>
-            <a:r>
-              <a:rPr lang="en-US" sz="1700" dirty="0">
-                <a:solidFill>
-                  <a:srgbClr val="101828"/>
+              <a:buNone/>
+            </a:pPr>
+            <a:r>
+              <a:rPr lang="en-US" sz="1600" b="1" dirty="0">
+                <a:solidFill>
+                  <a:srgbClr val="08A6A6"/>
                 </a:solidFill>
                 <a:latin typeface="IBM Plex Sans" pitchFamily="34" charset="0"/>
                 <a:ea typeface="IBM Plex Sans" pitchFamily="34" charset="-122"/>
                 <a:cs typeface="IBM Plex Sans" pitchFamily="34" charset="-120"/>
               </a:rPr>
-              <a:t>An array called prize holds eight prizes. Describe how a random number could be used to choose one of them, and state the range that number must come from.</a:t>
-            </a:r>
-            <a:endParaRPr lang="en-US" sz="1700" dirty="0"/>
+              <a:t>Read the brackets first</a:t>
+            </a:r>
+            <a:endParaRPr lang="en-US" sz="1600" dirty="0"/>
+          </a:p>
+        </p:txBody>
+      </p:sp>
+      <p:sp>
+        <p:nvSpPr>
+          <p:cNvPr id="12" name="Text 10"/>
+          <p:cNvSpPr txBox="1"/>
+          <p:nvPr/>
+        </p:nvSpPr>
+        <p:spPr>
+          <a:xfrm>
+            <a:off x="6537960" y="2395728"/>
+            <a:ext cx="4754880" cy="1005840"/>
+          </a:xfrm>
+          <a:prstGeom prst="rect">
+            <a:avLst/>
+          </a:prstGeom>
+          <a:noFill/>
+          <a:ln/>
+        </p:spPr>
+        <p:txBody>
+          <a:bodyPr wrap="square" lIns="0" tIns="0" rIns="0" bIns="0" rtlCol="0" anchor="t"/>
+          <a:lstStyle/>
+          <a:p>
+            <a:pPr indent="0" marL="0">
+              <a:lnSpc>
+                <a:spcPct val="120000"/>
+              </a:lnSpc>
+              <a:buNone/>
+            </a:pPr>
+            <a:r>
+              <a:rPr lang="en-US" sz="1300" dirty="0">
+                <a:solidFill>
+                  <a:srgbClr val="667085"/>
+                </a:solidFill>
+                <a:latin typeface="IBM Plex Sans" pitchFamily="34" charset="0"/>
+                <a:ea typeface="IBM Plex Sans" pitchFamily="34" charset="-122"/>
+                <a:cs typeface="IBM Plex Sans" pitchFamily="34" charset="-120"/>
+              </a:rPr>
+              <a:t>In an exam question the two numbers in the brackets are most of the marks. Before you answer anything else, write down the lowest and the highest value that the call could possibly return.</a:t>
+            </a:r>
+            <a:endParaRPr lang="en-US" sz="1300" dirty="0"/>
           </a:p>
         </p:txBody>
       </p:sp>
@@ -4204,73 +4468,12 @@
         </p:nvSpPr>
         <p:spPr>
           <a:xfrm>
-            <a:off x="10515600" y="3429000"/>
-            <a:ext cx="868680" cy="493776"/>
+            <a:off x="502920" y="3794760"/>
+            <a:ext cx="5394960" cy="1737360"/>
           </a:xfrm>
           <a:prstGeom prst="roundRect">
             <a:avLst>
-              <a:gd name="adj" fmla="val 18519"/>
-            </a:avLst>
-          </a:prstGeom>
-          <a:solidFill>
-            <a:srgbClr val="EEF2FB"/>
-          </a:solidFill>
-          <a:ln/>
-        </p:spPr>
-      </p:sp>
-      <p:sp>
-        <p:nvSpPr>
-          <p:cNvPr id="14" name="Text 12"/>
-          <p:cNvSpPr txBox="1"/>
-          <p:nvPr/>
-        </p:nvSpPr>
-        <p:spPr>
-          <a:xfrm>
-            <a:off x="10515600" y="3429000"/>
-            <a:ext cx="868680" cy="493776"/>
-          </a:xfrm>
-          <a:prstGeom prst="rect">
-            <a:avLst/>
-          </a:prstGeom>
-          <a:noFill/>
-          <a:ln/>
-        </p:spPr>
-        <p:txBody>
-          <a:bodyPr wrap="square" lIns="0" tIns="0" rIns="0" bIns="0" rtlCol="0" anchor="ctr"/>
-          <a:lstStyle/>
-          <a:p>
-            <a:pPr algn="ctr" indent="0" marL="0">
-              <a:buNone/>
-            </a:pPr>
-            <a:r>
-              <a:rPr lang="en-US" sz="1500" b="1" dirty="0">
-                <a:solidFill>
-                  <a:srgbClr val="2D63FF"/>
-                </a:solidFill>
-                <a:latin typeface="IBM Plex Mono" pitchFamily="34" charset="0"/>
-                <a:ea typeface="IBM Plex Mono" pitchFamily="34" charset="-122"/>
-                <a:cs typeface="IBM Plex Mono" pitchFamily="34" charset="-120"/>
-              </a:rPr>
-              <a:t>[3]</a:t>
-            </a:r>
-            <a:endParaRPr lang="en-US" sz="1500" dirty="0"/>
-          </a:p>
-        </p:txBody>
-      </p:sp>
-      <p:sp>
-        <p:nvSpPr>
-          <p:cNvPr id="15" name="Shape 13"/>
-          <p:cNvSpPr/>
-          <p:nvPr/>
-        </p:nvSpPr>
-        <p:spPr>
-          <a:xfrm>
-            <a:off x="502920" y="4425696"/>
-            <a:ext cx="11155680" cy="1097280"/>
-          </a:xfrm>
-          <a:prstGeom prst="roundRect">
-            <a:avLst>
-              <a:gd name="adj" fmla="val 10000"/>
+              <a:gd name="adj" fmla="val 6316"/>
             </a:avLst>
           </a:prstGeom>
           <a:solidFill>
@@ -4278,7 +4481,7 @@
           </a:solidFill>
           <a:ln w="15875">
             <a:solidFill>
-              <a:srgbClr val="D9DEE7"/>
+              <a:srgbClr val="2D63FF"/>
             </a:solidFill>
             <a:prstDash val="solid"/>
           </a:ln>
@@ -4286,14 +4489,14 @@
       </p:sp>
       <p:sp>
         <p:nvSpPr>
-          <p:cNvPr id="16" name="Text 14"/>
-          <p:cNvSpPr txBox="1"/>
-          <p:nvPr/>
-        </p:nvSpPr>
-        <p:spPr>
-          <a:xfrm>
-            <a:off x="914400" y="4535424"/>
-            <a:ext cx="9418320" cy="877824"/>
+          <p:cNvPr id="14" name="Text 12"/>
+          <p:cNvSpPr txBox="1"/>
+          <p:nvPr/>
+        </p:nvSpPr>
+        <p:spPr>
+          <a:xfrm>
+            <a:off x="822960" y="3977640"/>
+            <a:ext cx="4754880" cy="365760"/>
           </a:xfrm>
           <a:prstGeom prst="rect">
             <a:avLst/>
@@ -4306,47 +4509,130 @@
           <a:lstStyle/>
           <a:p>
             <a:pPr indent="0" marL="0">
-              <a:lnSpc>
-                <a:spcPct val="118000"/>
-              </a:lnSpc>
-              <a:buNone/>
-            </a:pPr>
-            <a:r>
-              <a:rPr lang="en-US" sz="1700" dirty="0">
-                <a:solidFill>
-                  <a:srgbClr val="101828"/>
+              <a:buNone/>
+            </a:pPr>
+            <a:r>
+              <a:rPr lang="en-US" sz="1600" b="1" dirty="0">
+                <a:solidFill>
+                  <a:srgbClr val="2D63FF"/>
                 </a:solidFill>
                 <a:latin typeface="IBM Plex Sans" pitchFamily="34" charset="0"/>
                 <a:ea typeface="IBM Plex Sans" pitchFamily="34" charset="-122"/>
                 <a:cs typeface="IBM Plex Sans" pitchFamily="34" charset="-120"/>
               </a:rPr>
-              <a:t>Explain why the numbers produced by a computer are described as pseudo-random.</a:t>
-            </a:r>
-            <a:endParaRPr lang="en-US" sz="1700" dirty="0"/>
-          </a:p>
-        </p:txBody>
-      </p:sp>
-      <p:sp>
-        <p:nvSpPr>
-          <p:cNvPr id="17" name="Shape 15"/>
+              <a:t>Off by one</a:t>
+            </a:r>
+            <a:endParaRPr lang="en-US" sz="1600" dirty="0"/>
+          </a:p>
+        </p:txBody>
+      </p:sp>
+      <p:sp>
+        <p:nvSpPr>
+          <p:cNvPr id="15" name="Text 13"/>
+          <p:cNvSpPr txBox="1"/>
+          <p:nvPr/>
+        </p:nvSpPr>
+        <p:spPr>
+          <a:xfrm>
+            <a:off x="822960" y="4361688"/>
+            <a:ext cx="4754880" cy="1005840"/>
+          </a:xfrm>
+          <a:prstGeom prst="rect">
+            <a:avLst/>
+          </a:prstGeom>
+          <a:noFill/>
+          <a:ln/>
+        </p:spPr>
+        <p:txBody>
+          <a:bodyPr wrap="square" lIns="0" tIns="0" rIns="0" bIns="0" rtlCol="0" anchor="t"/>
+          <a:lstStyle/>
+          <a:p>
+            <a:pPr indent="0" marL="0">
+              <a:lnSpc>
+                <a:spcPct val="120000"/>
+              </a:lnSpc>
+              <a:buNone/>
+            </a:pPr>
+            <a:r>
+              <a:rPr lang="en-US" sz="1300" dirty="0">
+                <a:solidFill>
+                  <a:srgbClr val="667085"/>
+                </a:solidFill>
+                <a:latin typeface="IBM Plex Sans" pitchFamily="34" charset="0"/>
+                <a:ea typeface="IBM Plex Sans" pitchFamily="34" charset="-122"/>
+                <a:cs typeface="IBM Plex Sans" pitchFamily="34" charset="-120"/>
+              </a:rPr>
+              <a:t>A range that is one too wide is one of the commonest bugs in programming. A random index that can equal the size of the array will crash the program eventually, but only on some runs, which makes it very hard to track down.</a:t>
+            </a:r>
+            <a:endParaRPr lang="en-US" sz="1300" dirty="0"/>
+          </a:p>
+        </p:txBody>
+      </p:sp>
+      <p:sp>
+        <p:nvSpPr>
+          <p:cNvPr id="16" name="Shape 14"/>
           <p:cNvSpPr/>
           <p:nvPr/>
         </p:nvSpPr>
         <p:spPr>
           <a:xfrm>
-            <a:off x="10515600" y="4727448"/>
-            <a:ext cx="868680" cy="493776"/>
+            <a:off x="6217920" y="3794760"/>
+            <a:ext cx="5394960" cy="1737360"/>
           </a:xfrm>
           <a:prstGeom prst="roundRect">
             <a:avLst>
-              <a:gd name="adj" fmla="val 18519"/>
+              <a:gd name="adj" fmla="val 6316"/>
             </a:avLst>
           </a:prstGeom>
           <a:solidFill>
-            <a:srgbClr val="EEF2FB"/>
+            <a:srgbClr val="FFFFFF"/>
           </a:solidFill>
-          <a:ln/>
-        </p:spPr>
+          <a:ln w="15875">
+            <a:solidFill>
+              <a:srgbClr val="08A6A6"/>
+            </a:solidFill>
+            <a:prstDash val="solid"/>
+          </a:ln>
+        </p:spPr>
+      </p:sp>
+      <p:sp>
+        <p:nvSpPr>
+          <p:cNvPr id="17" name="Text 15"/>
+          <p:cNvSpPr txBox="1"/>
+          <p:nvPr/>
+        </p:nvSpPr>
+        <p:spPr>
+          <a:xfrm>
+            <a:off x="6537960" y="3977640"/>
+            <a:ext cx="4754880" cy="365760"/>
+          </a:xfrm>
+          <a:prstGeom prst="rect">
+            <a:avLst/>
+          </a:prstGeom>
+          <a:noFill/>
+          <a:ln/>
+        </p:spPr>
+        <p:txBody>
+          <a:bodyPr wrap="square" lIns="0" tIns="0" rIns="0" bIns="0" rtlCol="0" anchor="ctr"/>
+          <a:lstStyle/>
+          <a:p>
+            <a:pPr indent="0" marL="0">
+              <a:buNone/>
+            </a:pPr>
+            <a:r>
+              <a:rPr lang="en-US" sz="1600" b="1" dirty="0">
+                <a:solidFill>
+                  <a:srgbClr val="08A6A6"/>
+                </a:solidFill>
+                <a:latin typeface="IBM Plex Sans" pitchFamily="34" charset="0"/>
+                <a:ea typeface="IBM Plex Sans" pitchFamily="34" charset="-122"/>
+                <a:cs typeface="IBM Plex Sans" pitchFamily="34" charset="-120"/>
+              </a:rPr>
+              <a:t>Where the seed comes from</a:t>
+            </a:r>
+            <a:endParaRPr lang="en-US" sz="1600" dirty="0"/>
+          </a:p>
+        </p:txBody>
       </p:sp>
       <p:sp>
         <p:nvSpPr>
@@ -4356,34 +4642,37 @@
         </p:nvSpPr>
         <p:spPr>
           <a:xfrm>
-            <a:off x="10515600" y="4727448"/>
-            <a:ext cx="868680" cy="493776"/>
-          </a:xfrm>
-          <a:prstGeom prst="rect">
-            <a:avLst/>
-          </a:prstGeom>
-          <a:noFill/>
-          <a:ln/>
-        </p:spPr>
-        <p:txBody>
-          <a:bodyPr wrap="square" lIns="0" tIns="0" rIns="0" bIns="0" rtlCol="0" anchor="ctr"/>
-          <a:lstStyle/>
-          <a:p>
-            <a:pPr algn="ctr" indent="0" marL="0">
-              <a:buNone/>
-            </a:pPr>
-            <a:r>
-              <a:rPr lang="en-US" sz="1500" b="1" dirty="0">
-                <a:solidFill>
-                  <a:srgbClr val="2D63FF"/>
-                </a:solidFill>
-                <a:latin typeface="IBM Plex Mono" pitchFamily="34" charset="0"/>
-                <a:ea typeface="IBM Plex Mono" pitchFamily="34" charset="-122"/>
-                <a:cs typeface="IBM Plex Mono" pitchFamily="34" charset="-120"/>
-              </a:rPr>
-              <a:t>[3]</a:t>
-            </a:r>
-            <a:endParaRPr lang="en-US" sz="1500" dirty="0"/>
+            <a:off x="6537960" y="4361688"/>
+            <a:ext cx="4754880" cy="1005840"/>
+          </a:xfrm>
+          <a:prstGeom prst="rect">
+            <a:avLst/>
+          </a:prstGeom>
+          <a:noFill/>
+          <a:ln/>
+        </p:spPr>
+        <p:txBody>
+          <a:bodyPr wrap="square" lIns="0" tIns="0" rIns="0" bIns="0" rtlCol="0" anchor="t"/>
+          <a:lstStyle/>
+          <a:p>
+            <a:pPr indent="0" marL="0">
+              <a:lnSpc>
+                <a:spcPct val="120000"/>
+              </a:lnSpc>
+              <a:buNone/>
+            </a:pPr>
+            <a:r>
+              <a:rPr lang="en-US" sz="1300" dirty="0">
+                <a:solidFill>
+                  <a:srgbClr val="667085"/>
+                </a:solidFill>
+                <a:latin typeface="IBM Plex Sans" pitchFamily="34" charset="0"/>
+                <a:ea typeface="IBM Plex Sans" pitchFamily="34" charset="-122"/>
+                <a:cs typeface="IBM Plex Sans" pitchFamily="34" charset="-120"/>
+              </a:rPr>
+              <a:t>Most languages take the seed from the system clock, measured in tiny fractions of a second, so two runs almost never start from the same place. Setting the seed yourself gives the same sequence every time, which is exactly what a tester wants.</a:t>
+            </a:r>
+            <a:endParaRPr lang="en-US" sz="1300" dirty="0"/>
           </a:p>
         </p:txBody>
       </p:sp>
@@ -4398,6 +4687,604 @@
 <file path=ppt/slides/slide14.xml><?xml version="1.0" encoding="utf-8"?>
 <p:sld xmlns:a="http://schemas.openxmlformats.org/drawingml/2006/main" xmlns:r="http://schemas.openxmlformats.org/officeDocument/2006/relationships" xmlns:p="http://schemas.openxmlformats.org/presentationml/2006/main">
   <p:cSld name="Slide 14">
+    <p:bg>
+      <p:bgPr>
+        <a:solidFill>
+          <a:srgbClr val="F7F7F4"/>
+        </a:solidFill>
+      </p:bgPr>
+    </p:bg>
+    <p:spTree>
+      <p:nvGrpSpPr>
+        <p:cNvPr id="1" name=""/>
+        <p:cNvGrpSpPr/>
+        <p:nvPr/>
+      </p:nvGrpSpPr>
+      <p:grpSpPr>
+        <a:xfrm>
+          <a:off x="0" y="0"/>
+          <a:ext cx="0" cy="0"/>
+          <a:chOff x="0" y="0"/>
+          <a:chExt cx="0" cy="0"/>
+        </a:xfrm>
+      </p:grpSpPr>
+      <p:sp>
+        <p:nvSpPr>
+          <p:cNvPr id="2" name="Shape 0"/>
+          <p:cNvSpPr/>
+          <p:nvPr/>
+        </p:nvSpPr>
+        <p:spPr>
+          <a:xfrm>
+            <a:off x="0" y="0"/>
+            <a:ext cx="12188952" cy="82296"/>
+          </a:xfrm>
+          <a:prstGeom prst="rect">
+            <a:avLst/>
+          </a:prstGeom>
+          <a:solidFill>
+            <a:srgbClr val="2D63FF"/>
+          </a:solidFill>
+          <a:ln/>
+        </p:spPr>
+      </p:sp>
+      <p:sp>
+        <p:nvSpPr>
+          <p:cNvPr id="3" name="Text 1"/>
+          <p:cNvSpPr txBox="1"/>
+          <p:nvPr/>
+        </p:nvSpPr>
+        <p:spPr>
+          <a:xfrm>
+            <a:off x="502920" y="6236208"/>
+            <a:ext cx="7772400" cy="365760"/>
+          </a:xfrm>
+          <a:prstGeom prst="rect">
+            <a:avLst/>
+          </a:prstGeom>
+          <a:noFill/>
+          <a:ln/>
+        </p:spPr>
+        <p:txBody>
+          <a:bodyPr wrap="square" lIns="0" tIns="0" rIns="0" bIns="0" rtlCol="0" anchor="ctr"/>
+          <a:lstStyle/>
+          <a:p>
+            <a:pPr indent="0" marL="0">
+              <a:buNone/>
+            </a:pPr>
+            <a:r>
+              <a:rPr lang="en-US" sz="1100" dirty="0">
+                <a:solidFill>
+                  <a:srgbClr val="667085"/>
+                </a:solidFill>
+                <a:latin typeface="IBM Plex Mono" pitchFamily="34" charset="0"/>
+                <a:ea typeface="IBM Plex Mono" pitchFamily="34" charset="-122"/>
+                <a:cs typeface="IBM Plex Mono" pitchFamily="34" charset="-120"/>
+              </a:rPr>
+              <a:t>2.2 Programming fundamentals  |  Lesson 6</a:t>
+            </a:r>
+            <a:endParaRPr lang="en-US" sz="1100" dirty="0"/>
+          </a:p>
+        </p:txBody>
+      </p:sp>
+      <p:sp>
+        <p:nvSpPr>
+          <p:cNvPr id="4" name="Text 2"/>
+          <p:cNvSpPr txBox="1"/>
+          <p:nvPr/>
+        </p:nvSpPr>
+        <p:spPr>
+          <a:xfrm>
+            <a:off x="9326880" y="6236208"/>
+            <a:ext cx="2377440" cy="365760"/>
+          </a:xfrm>
+          <a:prstGeom prst="rect">
+            <a:avLst/>
+          </a:prstGeom>
+          <a:noFill/>
+          <a:ln/>
+        </p:spPr>
+        <p:txBody>
+          <a:bodyPr wrap="square" lIns="0" tIns="0" rIns="0" bIns="0" rtlCol="0" anchor="ctr"/>
+          <a:lstStyle/>
+          <a:p>
+            <a:pPr algn="r" indent="0" marL="0">
+              <a:buNone/>
+            </a:pPr>
+            <a:r>
+              <a:rPr lang="en-US" sz="1100" dirty="0">
+                <a:solidFill>
+                  <a:srgbClr val="667085"/>
+                </a:solidFill>
+                <a:latin typeface="IBM Plex Mono" pitchFamily="34" charset="0"/>
+                <a:ea typeface="IBM Plex Mono" pitchFamily="34" charset="-122"/>
+                <a:cs typeface="IBM Plex Mono" pitchFamily="34" charset="-120"/>
+              </a:rPr>
+              <a:t>Revise 360</a:t>
+            </a:r>
+            <a:endParaRPr lang="en-US" sz="1100" dirty="0"/>
+          </a:p>
+        </p:txBody>
+      </p:sp>
+      <p:sp>
+        <p:nvSpPr>
+          <p:cNvPr id="5" name="Text 3"/>
+          <p:cNvSpPr txBox="1"/>
+          <p:nvPr/>
+        </p:nvSpPr>
+        <p:spPr>
+          <a:xfrm>
+            <a:off x="502920" y="411480"/>
+            <a:ext cx="11155680" cy="777240"/>
+          </a:xfrm>
+          <a:prstGeom prst="rect">
+            <a:avLst/>
+          </a:prstGeom>
+          <a:noFill/>
+          <a:ln/>
+        </p:spPr>
+        <p:txBody>
+          <a:bodyPr wrap="square" lIns="0" tIns="0" rIns="0" bIns="0" rtlCol="0" anchor="ctr"/>
+          <a:lstStyle/>
+          <a:p>
+            <a:pPr indent="0" marL="0">
+              <a:buNone/>
+            </a:pPr>
+            <a:r>
+              <a:rPr lang="en-US" sz="3200" b="1" dirty="0">
+                <a:solidFill>
+                  <a:srgbClr val="101828"/>
+                </a:solidFill>
+                <a:latin typeface="IBM Plex Sans" pitchFamily="34" charset="0"/>
+                <a:ea typeface="IBM Plex Sans" pitchFamily="34" charset="-122"/>
+                <a:cs typeface="IBM Plex Sans" pitchFamily="34" charset="-120"/>
+              </a:rPr>
+              <a:t>Exam practice</a:t>
+            </a:r>
+            <a:endParaRPr lang="en-US" sz="3200" dirty="0"/>
+          </a:p>
+        </p:txBody>
+      </p:sp>
+      <p:sp>
+        <p:nvSpPr>
+          <p:cNvPr id="6" name="Text 4"/>
+          <p:cNvSpPr txBox="1"/>
+          <p:nvPr/>
+        </p:nvSpPr>
+        <p:spPr>
+          <a:xfrm>
+            <a:off x="502920" y="1170432"/>
+            <a:ext cx="11155680" cy="411480"/>
+          </a:xfrm>
+          <a:prstGeom prst="rect">
+            <a:avLst/>
+          </a:prstGeom>
+          <a:noFill/>
+          <a:ln/>
+        </p:spPr>
+        <p:txBody>
+          <a:bodyPr wrap="square" lIns="0" tIns="0" rIns="0" bIns="0" rtlCol="0" anchor="ctr"/>
+          <a:lstStyle/>
+          <a:p>
+            <a:pPr indent="0" marL="0">
+              <a:buNone/>
+            </a:pPr>
+            <a:r>
+              <a:rPr lang="en-US" sz="1500" dirty="0">
+                <a:solidFill>
+                  <a:srgbClr val="667085"/>
+                </a:solidFill>
+                <a:latin typeface="IBM Plex Sans" pitchFamily="34" charset="0"/>
+                <a:ea typeface="IBM Plex Sans" pitchFamily="34" charset="-122"/>
+                <a:cs typeface="IBM Plex Sans" pitchFamily="34" charset="-120"/>
+              </a:rPr>
+              <a:t>Devices away. Answer from memory on the worksheet.</a:t>
+            </a:r>
+            <a:endParaRPr lang="en-US" sz="1500" dirty="0"/>
+          </a:p>
+        </p:txBody>
+      </p:sp>
+      <p:sp>
+        <p:nvSpPr>
+          <p:cNvPr id="7" name="Shape 5"/>
+          <p:cNvSpPr/>
+          <p:nvPr/>
+        </p:nvSpPr>
+        <p:spPr>
+          <a:xfrm>
+            <a:off x="502920" y="1828800"/>
+            <a:ext cx="11155680" cy="1097280"/>
+          </a:xfrm>
+          <a:prstGeom prst="roundRect">
+            <a:avLst>
+              <a:gd name="adj" fmla="val 10000"/>
+            </a:avLst>
+          </a:prstGeom>
+          <a:solidFill>
+            <a:srgbClr val="FFFFFF"/>
+          </a:solidFill>
+          <a:ln w="15875">
+            <a:solidFill>
+              <a:srgbClr val="D9DEE7"/>
+            </a:solidFill>
+            <a:prstDash val="solid"/>
+          </a:ln>
+        </p:spPr>
+      </p:sp>
+      <p:sp>
+        <p:nvSpPr>
+          <p:cNvPr id="8" name="Text 6"/>
+          <p:cNvSpPr txBox="1"/>
+          <p:nvPr/>
+        </p:nvSpPr>
+        <p:spPr>
+          <a:xfrm>
+            <a:off x="914400" y="1938528"/>
+            <a:ext cx="9418320" cy="877824"/>
+          </a:xfrm>
+          <a:prstGeom prst="rect">
+            <a:avLst/>
+          </a:prstGeom>
+          <a:noFill/>
+          <a:ln/>
+        </p:spPr>
+        <p:txBody>
+          <a:bodyPr wrap="square" lIns="0" tIns="0" rIns="0" bIns="0" rtlCol="0" anchor="ctr"/>
+          <a:lstStyle/>
+          <a:p>
+            <a:pPr indent="0" marL="0">
+              <a:lnSpc>
+                <a:spcPct val="118000"/>
+              </a:lnSpc>
+              <a:buNone/>
+            </a:pPr>
+            <a:r>
+              <a:rPr lang="en-US" sz="1700" dirty="0">
+                <a:solidFill>
+                  <a:srgbClr val="101828"/>
+                </a:solidFill>
+                <a:latin typeface="IBM Plex Sans" pitchFamily="34" charset="0"/>
+                <a:ea typeface="IBM Plex Sans" pitchFamily="34" charset="-122"/>
+                <a:cs typeface="IBM Plex Sans" pitchFamily="34" charset="-120"/>
+              </a:rPr>
+              <a:t>State two different reasons why a program might need a random number.</a:t>
+            </a:r>
+            <a:endParaRPr lang="en-US" sz="1700" dirty="0"/>
+          </a:p>
+        </p:txBody>
+      </p:sp>
+      <p:sp>
+        <p:nvSpPr>
+          <p:cNvPr id="9" name="Shape 7"/>
+          <p:cNvSpPr/>
+          <p:nvPr/>
+        </p:nvSpPr>
+        <p:spPr>
+          <a:xfrm>
+            <a:off x="10515600" y="2130552"/>
+            <a:ext cx="868680" cy="493776"/>
+          </a:xfrm>
+          <a:prstGeom prst="roundRect">
+            <a:avLst>
+              <a:gd name="adj" fmla="val 18519"/>
+            </a:avLst>
+          </a:prstGeom>
+          <a:solidFill>
+            <a:srgbClr val="EEF2FB"/>
+          </a:solidFill>
+          <a:ln/>
+        </p:spPr>
+      </p:sp>
+      <p:sp>
+        <p:nvSpPr>
+          <p:cNvPr id="10" name="Text 8"/>
+          <p:cNvSpPr txBox="1"/>
+          <p:nvPr/>
+        </p:nvSpPr>
+        <p:spPr>
+          <a:xfrm>
+            <a:off x="10515600" y="2130552"/>
+            <a:ext cx="868680" cy="493776"/>
+          </a:xfrm>
+          <a:prstGeom prst="rect">
+            <a:avLst/>
+          </a:prstGeom>
+          <a:noFill/>
+          <a:ln/>
+        </p:spPr>
+        <p:txBody>
+          <a:bodyPr wrap="square" lIns="0" tIns="0" rIns="0" bIns="0" rtlCol="0" anchor="ctr"/>
+          <a:lstStyle/>
+          <a:p>
+            <a:pPr algn="ctr" indent="0" marL="0">
+              <a:buNone/>
+            </a:pPr>
+            <a:r>
+              <a:rPr lang="en-US" sz="1500" b="1" dirty="0">
+                <a:solidFill>
+                  <a:srgbClr val="2D63FF"/>
+                </a:solidFill>
+                <a:latin typeface="IBM Plex Mono" pitchFamily="34" charset="0"/>
+                <a:ea typeface="IBM Plex Mono" pitchFamily="34" charset="-122"/>
+                <a:cs typeface="IBM Plex Mono" pitchFamily="34" charset="-120"/>
+              </a:rPr>
+              <a:t>[2]</a:t>
+            </a:r>
+            <a:endParaRPr lang="en-US" sz="1500" dirty="0"/>
+          </a:p>
+        </p:txBody>
+      </p:sp>
+      <p:sp>
+        <p:nvSpPr>
+          <p:cNvPr id="11" name="Shape 9"/>
+          <p:cNvSpPr/>
+          <p:nvPr/>
+        </p:nvSpPr>
+        <p:spPr>
+          <a:xfrm>
+            <a:off x="502920" y="3127248"/>
+            <a:ext cx="11155680" cy="1097280"/>
+          </a:xfrm>
+          <a:prstGeom prst="roundRect">
+            <a:avLst>
+              <a:gd name="adj" fmla="val 10000"/>
+            </a:avLst>
+          </a:prstGeom>
+          <a:solidFill>
+            <a:srgbClr val="FFFFFF"/>
+          </a:solidFill>
+          <a:ln w="15875">
+            <a:solidFill>
+              <a:srgbClr val="D9DEE7"/>
+            </a:solidFill>
+            <a:prstDash val="solid"/>
+          </a:ln>
+        </p:spPr>
+      </p:sp>
+      <p:sp>
+        <p:nvSpPr>
+          <p:cNvPr id="12" name="Text 10"/>
+          <p:cNvSpPr txBox="1"/>
+          <p:nvPr/>
+        </p:nvSpPr>
+        <p:spPr>
+          <a:xfrm>
+            <a:off x="914400" y="3236976"/>
+            <a:ext cx="9418320" cy="877824"/>
+          </a:xfrm>
+          <a:prstGeom prst="rect">
+            <a:avLst/>
+          </a:prstGeom>
+          <a:noFill/>
+          <a:ln/>
+        </p:spPr>
+        <p:txBody>
+          <a:bodyPr wrap="square" lIns="0" tIns="0" rIns="0" bIns="0" rtlCol="0" anchor="ctr"/>
+          <a:lstStyle/>
+          <a:p>
+            <a:pPr indent="0" marL="0">
+              <a:lnSpc>
+                <a:spcPct val="118000"/>
+              </a:lnSpc>
+              <a:buNone/>
+            </a:pPr>
+            <a:r>
+              <a:rPr lang="en-US" sz="1700" dirty="0">
+                <a:solidFill>
+                  <a:srgbClr val="101828"/>
+                </a:solidFill>
+                <a:latin typeface="IBM Plex Sans" pitchFamily="34" charset="0"/>
+                <a:ea typeface="IBM Plex Sans" pitchFamily="34" charset="-122"/>
+                <a:cs typeface="IBM Plex Sans" pitchFamily="34" charset="-120"/>
+              </a:rPr>
+              <a:t>An array called prize holds eight prizes. Describe how a random number could be used to choose one of them, and state the range that number must come from.</a:t>
+            </a:r>
+            <a:endParaRPr lang="en-US" sz="1700" dirty="0"/>
+          </a:p>
+        </p:txBody>
+      </p:sp>
+      <p:sp>
+        <p:nvSpPr>
+          <p:cNvPr id="13" name="Shape 11"/>
+          <p:cNvSpPr/>
+          <p:nvPr/>
+        </p:nvSpPr>
+        <p:spPr>
+          <a:xfrm>
+            <a:off x="10515600" y="3429000"/>
+            <a:ext cx="868680" cy="493776"/>
+          </a:xfrm>
+          <a:prstGeom prst="roundRect">
+            <a:avLst>
+              <a:gd name="adj" fmla="val 18519"/>
+            </a:avLst>
+          </a:prstGeom>
+          <a:solidFill>
+            <a:srgbClr val="EEF2FB"/>
+          </a:solidFill>
+          <a:ln/>
+        </p:spPr>
+      </p:sp>
+      <p:sp>
+        <p:nvSpPr>
+          <p:cNvPr id="14" name="Text 12"/>
+          <p:cNvSpPr txBox="1"/>
+          <p:nvPr/>
+        </p:nvSpPr>
+        <p:spPr>
+          <a:xfrm>
+            <a:off x="10515600" y="3429000"/>
+            <a:ext cx="868680" cy="493776"/>
+          </a:xfrm>
+          <a:prstGeom prst="rect">
+            <a:avLst/>
+          </a:prstGeom>
+          <a:noFill/>
+          <a:ln/>
+        </p:spPr>
+        <p:txBody>
+          <a:bodyPr wrap="square" lIns="0" tIns="0" rIns="0" bIns="0" rtlCol="0" anchor="ctr"/>
+          <a:lstStyle/>
+          <a:p>
+            <a:pPr algn="ctr" indent="0" marL="0">
+              <a:buNone/>
+            </a:pPr>
+            <a:r>
+              <a:rPr lang="en-US" sz="1500" b="1" dirty="0">
+                <a:solidFill>
+                  <a:srgbClr val="2D63FF"/>
+                </a:solidFill>
+                <a:latin typeface="IBM Plex Mono" pitchFamily="34" charset="0"/>
+                <a:ea typeface="IBM Plex Mono" pitchFamily="34" charset="-122"/>
+                <a:cs typeface="IBM Plex Mono" pitchFamily="34" charset="-120"/>
+              </a:rPr>
+              <a:t>[3]</a:t>
+            </a:r>
+            <a:endParaRPr lang="en-US" sz="1500" dirty="0"/>
+          </a:p>
+        </p:txBody>
+      </p:sp>
+      <p:sp>
+        <p:nvSpPr>
+          <p:cNvPr id="15" name="Shape 13"/>
+          <p:cNvSpPr/>
+          <p:nvPr/>
+        </p:nvSpPr>
+        <p:spPr>
+          <a:xfrm>
+            <a:off x="502920" y="4425696"/>
+            <a:ext cx="11155680" cy="1097280"/>
+          </a:xfrm>
+          <a:prstGeom prst="roundRect">
+            <a:avLst>
+              <a:gd name="adj" fmla="val 10000"/>
+            </a:avLst>
+          </a:prstGeom>
+          <a:solidFill>
+            <a:srgbClr val="FFFFFF"/>
+          </a:solidFill>
+          <a:ln w="15875">
+            <a:solidFill>
+              <a:srgbClr val="D9DEE7"/>
+            </a:solidFill>
+            <a:prstDash val="solid"/>
+          </a:ln>
+        </p:spPr>
+      </p:sp>
+      <p:sp>
+        <p:nvSpPr>
+          <p:cNvPr id="16" name="Text 14"/>
+          <p:cNvSpPr txBox="1"/>
+          <p:nvPr/>
+        </p:nvSpPr>
+        <p:spPr>
+          <a:xfrm>
+            <a:off x="914400" y="4535424"/>
+            <a:ext cx="9418320" cy="877824"/>
+          </a:xfrm>
+          <a:prstGeom prst="rect">
+            <a:avLst/>
+          </a:prstGeom>
+          <a:noFill/>
+          <a:ln/>
+        </p:spPr>
+        <p:txBody>
+          <a:bodyPr wrap="square" lIns="0" tIns="0" rIns="0" bIns="0" rtlCol="0" anchor="ctr"/>
+          <a:lstStyle/>
+          <a:p>
+            <a:pPr indent="0" marL="0">
+              <a:lnSpc>
+                <a:spcPct val="118000"/>
+              </a:lnSpc>
+              <a:buNone/>
+            </a:pPr>
+            <a:r>
+              <a:rPr lang="en-US" sz="1700" dirty="0">
+                <a:solidFill>
+                  <a:srgbClr val="101828"/>
+                </a:solidFill>
+                <a:latin typeface="IBM Plex Sans" pitchFamily="34" charset="0"/>
+                <a:ea typeface="IBM Plex Sans" pitchFamily="34" charset="-122"/>
+                <a:cs typeface="IBM Plex Sans" pitchFamily="34" charset="-120"/>
+              </a:rPr>
+              <a:t>Explain why the numbers produced by a computer are described as pseudo-random.</a:t>
+            </a:r>
+            <a:endParaRPr lang="en-US" sz="1700" dirty="0"/>
+          </a:p>
+        </p:txBody>
+      </p:sp>
+      <p:sp>
+        <p:nvSpPr>
+          <p:cNvPr id="17" name="Shape 15"/>
+          <p:cNvSpPr/>
+          <p:nvPr/>
+        </p:nvSpPr>
+        <p:spPr>
+          <a:xfrm>
+            <a:off x="10515600" y="4727448"/>
+            <a:ext cx="868680" cy="493776"/>
+          </a:xfrm>
+          <a:prstGeom prst="roundRect">
+            <a:avLst>
+              <a:gd name="adj" fmla="val 18519"/>
+            </a:avLst>
+          </a:prstGeom>
+          <a:solidFill>
+            <a:srgbClr val="EEF2FB"/>
+          </a:solidFill>
+          <a:ln/>
+        </p:spPr>
+      </p:sp>
+      <p:sp>
+        <p:nvSpPr>
+          <p:cNvPr id="18" name="Text 16"/>
+          <p:cNvSpPr txBox="1"/>
+          <p:nvPr/>
+        </p:nvSpPr>
+        <p:spPr>
+          <a:xfrm>
+            <a:off x="10515600" y="4727448"/>
+            <a:ext cx="868680" cy="493776"/>
+          </a:xfrm>
+          <a:prstGeom prst="rect">
+            <a:avLst/>
+          </a:prstGeom>
+          <a:noFill/>
+          <a:ln/>
+        </p:spPr>
+        <p:txBody>
+          <a:bodyPr wrap="square" lIns="0" tIns="0" rIns="0" bIns="0" rtlCol="0" anchor="ctr"/>
+          <a:lstStyle/>
+          <a:p>
+            <a:pPr algn="ctr" indent="0" marL="0">
+              <a:buNone/>
+            </a:pPr>
+            <a:r>
+              <a:rPr lang="en-US" sz="1500" b="1" dirty="0">
+                <a:solidFill>
+                  <a:srgbClr val="2D63FF"/>
+                </a:solidFill>
+                <a:latin typeface="IBM Plex Mono" pitchFamily="34" charset="0"/>
+                <a:ea typeface="IBM Plex Mono" pitchFamily="34" charset="-122"/>
+                <a:cs typeface="IBM Plex Mono" pitchFamily="34" charset="-120"/>
+              </a:rPr>
+              <a:t>[3]</a:t>
+            </a:r>
+            <a:endParaRPr lang="en-US" sz="1500" dirty="0"/>
+          </a:p>
+        </p:txBody>
+      </p:sp>
+    </p:spTree>
+  </p:cSld>
+  <p:clrMapOvr>
+    <a:masterClrMapping/>
+  </p:clrMapOvr>
+</p:sld>
+</file>
+
+<file path=ppt/slides/slide15.xml><?xml version="1.0" encoding="utf-8"?>
+<p:sld xmlns:a="http://schemas.openxmlformats.org/drawingml/2006/main" xmlns:r="http://schemas.openxmlformats.org/officeDocument/2006/relationships" xmlns:p="http://schemas.openxmlformats.org/presentationml/2006/main">
+  <p:cSld name="Slide 15">
     <p:bg>
       <p:bgPr>
         <a:solidFill>
